--- a/redes_neurais/slides/cap06_RPROP_e_variantes.pptx
+++ b/redes_neurais/slides/cap06_RPROP_e_variantes.pptx
@@ -952,7 +952,7 @@
           <a:p>
             <a:r>
               <a:rPr lang="en-US" dirty="0"/>
-              <a:t>Constantes de Riedmiller e Braun: η⁺ = 1,2 e η⁻ = 0,5; Δmax = 50 e Δmin = 1e-6 em muitas implementações. Confira o trainrp do MATLAB (delt_inc 1,2; delt_dec 0,5; delta0 0,07; deltamax 50).</a:t>
+              <a:t>Constantes de Riedmiller e Braun: η⁺ = 1,2 e η⁻ = 0,5; Δmax = 50 e Δmin = 1e-6 em muitas implementações. O scikit-learn não oferece RPROP (solvers: lbfgs, sgd, adam); usamos o pacote rnbook com os dados e as métricas do scikit-learn.</a:t>
             </a:r>
             <a:endParaRPr lang="en-US" dirty="0"/>
           </a:p>

--- a/redes_neurais/slides/cap06_RPROP_e_variantes.pptx
+++ b/redes_neurais/slides/cap06_RPROP_e_variantes.pptx
@@ -16,9 +16,15 @@
     <p:sldId id="264" r:id="rId10"/>
     <p:sldId id="265" r:id="rId11"/>
     <p:sldId id="266" r:id="rId12"/>
+    <p:sldId id="267" r:id="rId13"/>
+    <p:sldId id="268" r:id="rId14"/>
+    <p:sldId id="269" r:id="rId15"/>
+    <p:sldId id="270" r:id="rId16"/>
+    <p:sldId id="271" r:id="rId17"/>
+    <p:sldId id="272" r:id="rId18"/>
   </p:sldIdLst>
   <p:notesMasterIdLst>
-    <p:notesMasterId r:id="rId13"/>
+    <p:notesMasterId r:id="rId19"/>
   </p:notesMasterIdLst>
   <p:sldSz cx="9144000" cy="5143500"/>
   <p:notesSz cx="5143500" cy="9144000"/>
@@ -600,7 +606,7 @@
           <a:p>
             <a:r>
               <a:rPr lang="en-US" dirty="0"/>
-              <a:t>Resposta: w = 2,5 (g=2; sem sinal anterior); Δ=0,6 e w=1,9; Δ=0,72 e w=1,18; Δ=0,864 e w=0,316; na 5ª iteração o sinal troca (g&lt;0): Δ=0,432, g é zerado e w permanece 0,316 (confirmado com o pacote rnbook).</a:t>
+              <a:t>Resultado do livro (rede 1–100–1, 30 pontos): RMSE de teste 0,437 com parada antecipada contra 0,528 sem ela.</a:t>
             </a:r>
             <a:endParaRPr lang="en-US" dirty="0"/>
           </a:p>
@@ -688,7 +694,7 @@
           <a:p>
             <a:r>
               <a:rPr lang="en-US" dirty="0"/>
-              <a:t>Próximo: o método de segunda ordem mais usado em redes pequenas, o LM.</a:t>
+              <a:t>RPROP foi projetado para treinamento em lote.</a:t>
             </a:r>
             <a:endParaRPr lang="en-US" dirty="0"/>
           </a:p>
@@ -712,6 +718,534 @@
             <a:fld id="{F7021451-1387-4CA6-816F-3879F97B5CBC}" type="slidenum">
               <a:rPr lang="en-US"/>
               <a:t>11</a:t>
+            </a:fld>
+            <a:endParaRPr lang="en-US"/>
+          </a:p>
+        </p:txBody>
+      </p:sp>
+    </p:spTree>
+    <p:extLst>
+      <p:ext uri="{BB962C8B-B14F-4D97-AF65-F5344CB8AC3E}">
+        <p14:creationId xmlns:p14="http://schemas.microsoft.com/office/powerpoint/2010/main" val="1024086991"/>
+      </p:ext>
+    </p:extLst>
+  </p:cSld>
+  <p:clrMapOvr>
+    <a:masterClrMapping/>
+  </p:clrMapOvr>
+</p:notes>
+</file>
+
+<file path=ppt/notesSlides/notesSlide12.xml><?xml version="1.0" encoding="utf-8"?>
+<p:notes xmlns:a="http://schemas.openxmlformats.org/drawingml/2006/main" xmlns:r="http://schemas.openxmlformats.org/officeDocument/2006/relationships" xmlns:p="http://schemas.openxmlformats.org/presentationml/2006/main">
+  <p:cSld>
+    <p:spTree>
+      <p:nvGrpSpPr>
+        <p:cNvPr id="1" name=""/>
+        <p:cNvGrpSpPr/>
+        <p:nvPr/>
+      </p:nvGrpSpPr>
+      <p:grpSpPr>
+        <a:xfrm>
+          <a:off x="0" y="0"/>
+          <a:ext cx="0" cy="0"/>
+          <a:chOff x="0" y="0"/>
+          <a:chExt cx="0" cy="0"/>
+        </a:xfrm>
+      </p:grpSpPr>
+      <p:sp>
+        <p:nvSpPr>
+          <p:cNvPr id="2" name="Slide Image Placeholder 1"/>
+          <p:cNvSpPr>
+            <a:spLocks noGrp="1" noRot="1" noChangeAspect="1"/>
+          </p:cNvSpPr>
+          <p:nvPr>
+            <p:ph type="sldImg"/>
+          </p:nvPr>
+        </p:nvSpPr>
+        <p:spPr/>
+      </p:sp>
+      <p:sp>
+        <p:nvSpPr>
+          <p:cNvPr id="3" name="Notes Placeholder 2"/>
+          <p:cNvSpPr>
+            <a:spLocks noGrp="1"/>
+          </p:cNvSpPr>
+          <p:nvPr>
+            <p:ph type="body" idx="1"/>
+          </p:nvPr>
+        </p:nvSpPr>
+        <p:spPr/>
+        <p:txBody>
+          <a:bodyPr/>
+          <a:lstStyle/>
+          <a:p>
+            <a:r>
+              <a:rPr lang="en-US" dirty="0"/>
+              <a:t>Estas são regras distintas: relate sempre a variante e os parâmetros usados.</a:t>
+            </a:r>
+            <a:endParaRPr lang="en-US" dirty="0"/>
+          </a:p>
+        </p:txBody>
+      </p:sp>
+      <p:sp>
+        <p:nvSpPr>
+          <p:cNvPr id="4" name="Slide Number Placeholder 3"/>
+          <p:cNvSpPr>
+            <a:spLocks noGrp="1"/>
+          </p:cNvSpPr>
+          <p:nvPr>
+            <p:ph type="sldNum" sz="quarter" idx="10"/>
+          </p:nvPr>
+        </p:nvSpPr>
+        <p:spPr/>
+        <p:txBody>
+          <a:bodyPr/>
+          <a:lstStyle/>
+          <a:p>
+            <a:fld id="{F7021451-1387-4CA6-816F-3879F97B5CBC}" type="slidenum">
+              <a:rPr lang="en-US"/>
+              <a:t>12</a:t>
+            </a:fld>
+            <a:endParaRPr lang="en-US"/>
+          </a:p>
+        </p:txBody>
+      </p:sp>
+    </p:spTree>
+    <p:extLst>
+      <p:ext uri="{BB962C8B-B14F-4D97-AF65-F5344CB8AC3E}">
+        <p14:creationId xmlns:p14="http://schemas.microsoft.com/office/powerpoint/2010/main" val="1024086991"/>
+      </p:ext>
+    </p:extLst>
+  </p:cSld>
+  <p:clrMapOvr>
+    <a:masterClrMapping/>
+  </p:clrMapOvr>
+</p:notes>
+</file>
+
+<file path=ppt/notesSlides/notesSlide13.xml><?xml version="1.0" encoding="utf-8"?>
+<p:notes xmlns:a="http://schemas.openxmlformats.org/drawingml/2006/main" xmlns:r="http://schemas.openxmlformats.org/officeDocument/2006/relationships" xmlns:p="http://schemas.openxmlformats.org/presentationml/2006/main">
+  <p:cSld>
+    <p:spTree>
+      <p:nvGrpSpPr>
+        <p:cNvPr id="1" name=""/>
+        <p:cNvGrpSpPr/>
+        <p:nvPr/>
+      </p:nvGrpSpPr>
+      <p:grpSpPr>
+        <a:xfrm>
+          <a:off x="0" y="0"/>
+          <a:ext cx="0" cy="0"/>
+          <a:chOff x="0" y="0"/>
+          <a:chExt cx="0" cy="0"/>
+        </a:xfrm>
+      </p:grpSpPr>
+      <p:sp>
+        <p:nvSpPr>
+          <p:cNvPr id="2" name="Slide Image Placeholder 1"/>
+          <p:cNvSpPr>
+            <a:spLocks noGrp="1" noRot="1" noChangeAspect="1"/>
+          </p:cNvSpPr>
+          <p:nvPr>
+            <p:ph type="sldImg"/>
+          </p:nvPr>
+        </p:nvSpPr>
+        <p:spPr/>
+      </p:sp>
+      <p:sp>
+        <p:nvSpPr>
+          <p:cNvPr id="3" name="Notes Placeholder 2"/>
+          <p:cNvSpPr>
+            <a:spLocks noGrp="1"/>
+          </p:cNvSpPr>
+          <p:nvPr>
+            <p:ph type="body" idx="1"/>
+          </p:nvPr>
+        </p:nvSpPr>
+        <p:spPr/>
+        <p:txBody>
+          <a:bodyPr/>
+          <a:lstStyle/>
+          <a:p>
+            <a:r>
+              <a:rPr lang="en-US" dirty="0"/>
+              <a:t>Resposta: A) Apenas o sinal. Δw = −sinal(g)·Δ, com Δ adaptado por peso. Dê um minuto para votação antes de revelar.</a:t>
+            </a:r>
+            <a:endParaRPr lang="en-US" dirty="0"/>
+          </a:p>
+        </p:txBody>
+      </p:sp>
+      <p:sp>
+        <p:nvSpPr>
+          <p:cNvPr id="4" name="Slide Number Placeholder 3"/>
+          <p:cNvSpPr>
+            <a:spLocks noGrp="1"/>
+          </p:cNvSpPr>
+          <p:nvPr>
+            <p:ph type="sldNum" sz="quarter" idx="10"/>
+          </p:nvPr>
+        </p:nvSpPr>
+        <p:spPr/>
+        <p:txBody>
+          <a:bodyPr/>
+          <a:lstStyle/>
+          <a:p>
+            <a:fld id="{F7021451-1387-4CA6-816F-3879F97B5CBC}" type="slidenum">
+              <a:rPr lang="en-US"/>
+              <a:t>13</a:t>
+            </a:fld>
+            <a:endParaRPr lang="en-US"/>
+          </a:p>
+        </p:txBody>
+      </p:sp>
+    </p:spTree>
+    <p:extLst>
+      <p:ext uri="{BB962C8B-B14F-4D97-AF65-F5344CB8AC3E}">
+        <p14:creationId xmlns:p14="http://schemas.microsoft.com/office/powerpoint/2010/main" val="1024086991"/>
+      </p:ext>
+    </p:extLst>
+  </p:cSld>
+  <p:clrMapOvr>
+    <a:masterClrMapping/>
+  </p:clrMapOvr>
+</p:notes>
+</file>
+
+<file path=ppt/notesSlides/notesSlide14.xml><?xml version="1.0" encoding="utf-8"?>
+<p:notes xmlns:a="http://schemas.openxmlformats.org/drawingml/2006/main" xmlns:r="http://schemas.openxmlformats.org/officeDocument/2006/relationships" xmlns:p="http://schemas.openxmlformats.org/presentationml/2006/main">
+  <p:cSld>
+    <p:spTree>
+      <p:nvGrpSpPr>
+        <p:cNvPr id="1" name=""/>
+        <p:cNvGrpSpPr/>
+        <p:nvPr/>
+      </p:nvGrpSpPr>
+      <p:grpSpPr>
+        <a:xfrm>
+          <a:off x="0" y="0"/>
+          <a:ext cx="0" cy="0"/>
+          <a:chOff x="0" y="0"/>
+          <a:chExt cx="0" cy="0"/>
+        </a:xfrm>
+      </p:grpSpPr>
+      <p:sp>
+        <p:nvSpPr>
+          <p:cNvPr id="2" name="Slide Image Placeholder 1"/>
+          <p:cNvSpPr>
+            <a:spLocks noGrp="1" noRot="1" noChangeAspect="1"/>
+          </p:cNvSpPr>
+          <p:nvPr>
+            <p:ph type="sldImg"/>
+          </p:nvPr>
+        </p:nvSpPr>
+        <p:spPr/>
+      </p:sp>
+      <p:sp>
+        <p:nvSpPr>
+          <p:cNvPr id="3" name="Notes Placeholder 2"/>
+          <p:cNvSpPr>
+            <a:spLocks noGrp="1"/>
+          </p:cNvSpPr>
+          <p:nvPr>
+            <p:ph type="body" idx="1"/>
+          </p:nvPr>
+        </p:nvSpPr>
+        <p:spPr/>
+        <p:txBody>
+          <a:bodyPr/>
+          <a:lstStyle/>
+          <a:p>
+            <a:r>
+              <a:rPr lang="en-US" dirty="0"/>
+              <a:t>Resposta: A) Reduzido (× 0,5). A troca de sinal indica que o mínimo foi ultrapassado. Dê um minuto para votação antes de revelar.</a:t>
+            </a:r>
+            <a:endParaRPr lang="en-US" dirty="0"/>
+          </a:p>
+        </p:txBody>
+      </p:sp>
+      <p:sp>
+        <p:nvSpPr>
+          <p:cNvPr id="4" name="Slide Number Placeholder 3"/>
+          <p:cNvSpPr>
+            <a:spLocks noGrp="1"/>
+          </p:cNvSpPr>
+          <p:nvPr>
+            <p:ph type="sldNum" sz="quarter" idx="10"/>
+          </p:nvPr>
+        </p:nvSpPr>
+        <p:spPr/>
+        <p:txBody>
+          <a:bodyPr/>
+          <a:lstStyle/>
+          <a:p>
+            <a:fld id="{F7021451-1387-4CA6-816F-3879F97B5CBC}" type="slidenum">
+              <a:rPr lang="en-US"/>
+              <a:t>14</a:t>
+            </a:fld>
+            <a:endParaRPr lang="en-US"/>
+          </a:p>
+        </p:txBody>
+      </p:sp>
+    </p:spTree>
+    <p:extLst>
+      <p:ext uri="{BB962C8B-B14F-4D97-AF65-F5344CB8AC3E}">
+        <p14:creationId xmlns:p14="http://schemas.microsoft.com/office/powerpoint/2010/main" val="1024086991"/>
+      </p:ext>
+    </p:extLst>
+  </p:cSld>
+  <p:clrMapOvr>
+    <a:masterClrMapping/>
+  </p:clrMapOvr>
+</p:notes>
+</file>
+
+<file path=ppt/notesSlides/notesSlide15.xml><?xml version="1.0" encoding="utf-8"?>
+<p:notes xmlns:a="http://schemas.openxmlformats.org/drawingml/2006/main" xmlns:r="http://schemas.openxmlformats.org/officeDocument/2006/relationships" xmlns:p="http://schemas.openxmlformats.org/presentationml/2006/main">
+  <p:cSld>
+    <p:spTree>
+      <p:nvGrpSpPr>
+        <p:cNvPr id="1" name=""/>
+        <p:cNvGrpSpPr/>
+        <p:nvPr/>
+      </p:nvGrpSpPr>
+      <p:grpSpPr>
+        <a:xfrm>
+          <a:off x="0" y="0"/>
+          <a:ext cx="0" cy="0"/>
+          <a:chOff x="0" y="0"/>
+          <a:chExt cx="0" cy="0"/>
+        </a:xfrm>
+      </p:grpSpPr>
+      <p:sp>
+        <p:nvSpPr>
+          <p:cNvPr id="2" name="Slide Image Placeholder 1"/>
+          <p:cNvSpPr>
+            <a:spLocks noGrp="1" noRot="1" noChangeAspect="1"/>
+          </p:cNvSpPr>
+          <p:nvPr>
+            <p:ph type="sldImg"/>
+          </p:nvPr>
+        </p:nvSpPr>
+        <p:spPr/>
+      </p:sp>
+      <p:sp>
+        <p:nvSpPr>
+          <p:cNvPr id="3" name="Notes Placeholder 2"/>
+          <p:cNvSpPr>
+            <a:spLocks noGrp="1"/>
+          </p:cNvSpPr>
+          <p:nvPr>
+            <p:ph type="body" idx="1"/>
+          </p:nvPr>
+        </p:nvSpPr>
+        <p:spPr/>
+        <p:txBody>
+          <a:bodyPr/>
+          <a:lstStyle/>
+          <a:p>
+            <a:r>
+              <a:rPr lang="en-US" dirty="0"/>
+              <a:t>Resposta: w = 2,5 (g=2; sem sinal anterior); Δ=0,6 e w=1,9; Δ=0,72 e w=1,18; Δ=0,864 e w=0,316; na 5ª iteração o sinal troca (g&lt;0): Δ=0,432, g é zerado e w permanece 0,316 (confirmado com o pacote rnbook).</a:t>
+            </a:r>
+            <a:endParaRPr lang="en-US" dirty="0"/>
+          </a:p>
+        </p:txBody>
+      </p:sp>
+      <p:sp>
+        <p:nvSpPr>
+          <p:cNvPr id="4" name="Slide Number Placeholder 3"/>
+          <p:cNvSpPr>
+            <a:spLocks noGrp="1"/>
+          </p:cNvSpPr>
+          <p:nvPr>
+            <p:ph type="sldNum" sz="quarter" idx="10"/>
+          </p:nvPr>
+        </p:nvSpPr>
+        <p:spPr/>
+        <p:txBody>
+          <a:bodyPr/>
+          <a:lstStyle/>
+          <a:p>
+            <a:fld id="{F7021451-1387-4CA6-816F-3879F97B5CBC}" type="slidenum">
+              <a:rPr lang="en-US"/>
+              <a:t>15</a:t>
+            </a:fld>
+            <a:endParaRPr lang="en-US"/>
+          </a:p>
+        </p:txBody>
+      </p:sp>
+    </p:spTree>
+    <p:extLst>
+      <p:ext uri="{BB962C8B-B14F-4D97-AF65-F5344CB8AC3E}">
+        <p14:creationId xmlns:p14="http://schemas.microsoft.com/office/powerpoint/2010/main" val="1024086991"/>
+      </p:ext>
+    </p:extLst>
+  </p:cSld>
+  <p:clrMapOvr>
+    <a:masterClrMapping/>
+  </p:clrMapOvr>
+</p:notes>
+</file>
+
+<file path=ppt/notesSlides/notesSlide16.xml><?xml version="1.0" encoding="utf-8"?>
+<p:notes xmlns:a="http://schemas.openxmlformats.org/drawingml/2006/main" xmlns:r="http://schemas.openxmlformats.org/officeDocument/2006/relationships" xmlns:p="http://schemas.openxmlformats.org/presentationml/2006/main">
+  <p:cSld>
+    <p:spTree>
+      <p:nvGrpSpPr>
+        <p:cNvPr id="1" name=""/>
+        <p:cNvGrpSpPr/>
+        <p:nvPr/>
+      </p:nvGrpSpPr>
+      <p:grpSpPr>
+        <a:xfrm>
+          <a:off x="0" y="0"/>
+          <a:ext cx="0" cy="0"/>
+          <a:chOff x="0" y="0"/>
+          <a:chExt cx="0" cy="0"/>
+        </a:xfrm>
+      </p:grpSpPr>
+      <p:sp>
+        <p:nvSpPr>
+          <p:cNvPr id="2" name="Slide Image Placeholder 1"/>
+          <p:cNvSpPr>
+            <a:spLocks noGrp="1" noRot="1" noChangeAspect="1"/>
+          </p:cNvSpPr>
+          <p:nvPr>
+            <p:ph type="sldImg"/>
+          </p:nvPr>
+        </p:nvSpPr>
+        <p:spPr/>
+      </p:sp>
+      <p:sp>
+        <p:nvSpPr>
+          <p:cNvPr id="3" name="Notes Placeholder 2"/>
+          <p:cNvSpPr>
+            <a:spLocks noGrp="1"/>
+          </p:cNvSpPr>
+          <p:nvPr>
+            <p:ph type="body" idx="1"/>
+          </p:nvPr>
+        </p:nvSpPr>
+        <p:spPr/>
+        <p:txBody>
+          <a:bodyPr/>
+          <a:lstStyle/>
+          <a:p>
+            <a:r>
+              <a:rPr lang="en-US" dirty="0"/>
+              <a:t>Próximo: o método de segunda ordem mais usado em redes pequenas, o LM.</a:t>
+            </a:r>
+            <a:endParaRPr lang="en-US" dirty="0"/>
+          </a:p>
+        </p:txBody>
+      </p:sp>
+      <p:sp>
+        <p:nvSpPr>
+          <p:cNvPr id="4" name="Slide Number Placeholder 3"/>
+          <p:cNvSpPr>
+            <a:spLocks noGrp="1"/>
+          </p:cNvSpPr>
+          <p:nvPr>
+            <p:ph type="sldNum" sz="quarter" idx="10"/>
+          </p:nvPr>
+        </p:nvSpPr>
+        <p:spPr/>
+        <p:txBody>
+          <a:bodyPr/>
+          <a:lstStyle/>
+          <a:p>
+            <a:fld id="{F7021451-1387-4CA6-816F-3879F97B5CBC}" type="slidenum">
+              <a:rPr lang="en-US"/>
+              <a:t>16</a:t>
+            </a:fld>
+            <a:endParaRPr lang="en-US"/>
+          </a:p>
+        </p:txBody>
+      </p:sp>
+    </p:spTree>
+    <p:extLst>
+      <p:ext uri="{BB962C8B-B14F-4D97-AF65-F5344CB8AC3E}">
+        <p14:creationId xmlns:p14="http://schemas.microsoft.com/office/powerpoint/2010/main" val="1024086991"/>
+      </p:ext>
+    </p:extLst>
+  </p:cSld>
+  <p:clrMapOvr>
+    <a:masterClrMapping/>
+  </p:clrMapOvr>
+</p:notes>
+</file>
+
+<file path=ppt/notesSlides/notesSlide17.xml><?xml version="1.0" encoding="utf-8"?>
+<p:notes xmlns:a="http://schemas.openxmlformats.org/drawingml/2006/main" xmlns:r="http://schemas.openxmlformats.org/officeDocument/2006/relationships" xmlns:p="http://schemas.openxmlformats.org/presentationml/2006/main">
+  <p:cSld>
+    <p:spTree>
+      <p:nvGrpSpPr>
+        <p:cNvPr id="1" name=""/>
+        <p:cNvGrpSpPr/>
+        <p:nvPr/>
+      </p:nvGrpSpPr>
+      <p:grpSpPr>
+        <a:xfrm>
+          <a:off x="0" y="0"/>
+          <a:ext cx="0" cy="0"/>
+          <a:chOff x="0" y="0"/>
+          <a:chExt cx="0" cy="0"/>
+        </a:xfrm>
+      </p:grpSpPr>
+      <p:sp>
+        <p:nvSpPr>
+          <p:cNvPr id="2" name="Slide Image Placeholder 1"/>
+          <p:cNvSpPr>
+            <a:spLocks noGrp="1" noRot="1" noChangeAspect="1"/>
+          </p:cNvSpPr>
+          <p:nvPr>
+            <p:ph type="sldImg"/>
+          </p:nvPr>
+        </p:nvSpPr>
+        <p:spPr/>
+      </p:sp>
+      <p:sp>
+        <p:nvSpPr>
+          <p:cNvPr id="3" name="Notes Placeholder 2"/>
+          <p:cNvSpPr>
+            <a:spLocks noGrp="1"/>
+          </p:cNvSpPr>
+          <p:nvPr>
+            <p:ph type="body" idx="1"/>
+          </p:nvPr>
+        </p:nvSpPr>
+        <p:spPr/>
+        <p:txBody>
+          <a:bodyPr/>
+          <a:lstStyle/>
+          <a:p>
+            <a:r>
+              <a:rPr lang="en-US" dirty="0"/>
+              <a:t>Feche com a frase e peça que os estudantes a expliquem com as próprias palavras.</a:t>
+            </a:r>
+            <a:endParaRPr lang="en-US" dirty="0"/>
+          </a:p>
+        </p:txBody>
+      </p:sp>
+      <p:sp>
+        <p:nvSpPr>
+          <p:cNvPr id="4" name="Slide Number Placeholder 3"/>
+          <p:cNvSpPr>
+            <a:spLocks noGrp="1"/>
+          </p:cNvSpPr>
+          <p:nvPr>
+            <p:ph type="sldNum" sz="quarter" idx="10"/>
+          </p:nvPr>
+        </p:nvSpPr>
+        <p:spPr/>
+        <p:txBody>
+          <a:bodyPr/>
+          <a:lstStyle/>
+          <a:p>
+            <a:fld id="{F7021451-1387-4CA6-816F-3879F97B5CBC}" type="slidenum">
+              <a:rPr lang="en-US"/>
+              <a:t>17</a:t>
             </a:fld>
             <a:endParaRPr lang="en-US"/>
           </a:p>
@@ -776,7 +1310,7 @@
           <a:p>
             <a:r>
               <a:rPr lang="en-US" dirty="0"/>
-              <a:t>Analogia: um motorista que só pergunta 'continuo no mesmo sentido?' e ajusta a marcha.</a:t>
+              <a:t>Apresente o roteiro e o tempo estimado de cada bloco (cerca de 2 minutos por slide).</a:t>
             </a:r>
             <a:endParaRPr lang="en-US" dirty="0"/>
           </a:p>
@@ -864,7 +1398,7 @@
           <a:p>
             <a:r>
               <a:rPr lang="en-US" dirty="0"/>
-              <a:t>O vetor de passo tem módulo comandado pelos Δᵢ, não pelo gradiente.</a:t>
+              <a:t>Analogia: um motorista que só pergunta 'continuo no mesmo sentido?' e ajusta a marcha.</a:t>
             </a:r>
             <a:endParaRPr lang="en-US" dirty="0"/>
           </a:p>
@@ -952,7 +1486,7 @@
           <a:p>
             <a:r>
               <a:rPr lang="en-US" dirty="0"/>
-              <a:t>Constantes de Riedmiller e Braun: η⁺ = 1,2 e η⁻ = 0,5; Δmax = 50 e Δmin = 1e-6 em muitas implementações. O scikit-learn não oferece RPROP (solvers: lbfgs, sgd, adam); usamos o pacote rnbook com os dados e as métricas do scikit-learn.</a:t>
+              <a:t>O vetor de passo tem módulo comandado pelos Δᵢ, não pelo gradiente.</a:t>
             </a:r>
             <a:endParaRPr lang="en-US" dirty="0"/>
           </a:p>
@@ -1040,7 +1574,7 @@
           <a:p>
             <a:r>
               <a:rPr lang="en-US" dirty="0"/>
-              <a:t>RPROP+: retrocesso do peso sempre; RPROP−: sem retrocesso; iRPROP+: retrocesso só se o erro aumentou; iRPROP−: sem retrocesso, gradiente zerado.</a:t>
+              <a:t>O RPROP é robusto à escala do gradiente: plano ou íngreme, o sinal é o mesmo.</a:t>
             </a:r>
             <a:endParaRPr lang="en-US" dirty="0"/>
           </a:p>
@@ -1128,7 +1662,7 @@
           <a:p>
             <a:r>
               <a:rPr lang="en-US" dirty="0"/>
-              <a:t>Mostre que, quando o sinal muda, o passo cai pela metade; quando não muda, cresce 20%.</a:t>
+              <a:t>Constantes de Riedmiller e Braun: η⁺ = 1,2 e η⁻ = 0,5; Δmax = 50 e Δmin = 1e-6 em muitas implementações. O scikit-learn não oferece RPROP (solvers: lbfgs, sgd, adam); usamos o pacote rnbook com os dados e as métricas do scikit-learn.</a:t>
             </a:r>
             <a:endParaRPr lang="en-US" dirty="0"/>
           </a:p>
@@ -1216,7 +1750,7 @@
           <a:p>
             <a:r>
               <a:rPr lang="en-US" dirty="0"/>
-              <a:t>Diferenças entre variantes são pequenas e dependem do problema. Não concluir que uma variante é a melhor.</a:t>
+              <a:t>RPROP+: retrocesso do peso sempre; RPROP−: sem retrocesso; iRPROP+: retrocesso só se o erro aumentou; iRPROP−: sem retrocesso, gradiente zerado.</a:t>
             </a:r>
             <a:endParaRPr lang="en-US" dirty="0"/>
           </a:p>
@@ -1304,7 +1838,7 @@
           <a:p>
             <a:r>
               <a:rPr lang="en-US" dirty="0"/>
-              <a:t>Resultado do livro (rede 1–100–1, 30 pontos): RMSE de teste 0,437 com parada antecipada contra 0,528 sem ela.</a:t>
+              <a:t>Mostre que, quando o sinal muda, o passo cai pela metade; quando não muda, cresce 20%.</a:t>
             </a:r>
             <a:endParaRPr lang="en-US" dirty="0"/>
           </a:p>
@@ -1392,7 +1926,7 @@
           <a:p>
             <a:r>
               <a:rPr lang="en-US" dirty="0"/>
-              <a:t>RPROP foi projetado para treinamento em lote.</a:t>
+              <a:t>Diferenças entre variantes são pequenas e dependem do problema. Não concluir que uma variante é a melhor.</a:t>
             </a:r>
             <a:endParaRPr lang="en-US" dirty="0"/>
           </a:p>
@@ -2201,85 +2735,46 @@
                 <a:ea typeface="Calibri" pitchFamily="34" charset="-122"/>
                 <a:cs typeface="Calibri" pitchFamily="34" charset="-120"/>
               </a:rPr>
-              <a:t>Atividade</a:t>
+              <a:t>Parada antecipada</a:t>
             </a:r>
             <a:endParaRPr lang="en-US" sz="2600" dirty="0"/>
           </a:p>
         </p:txBody>
       </p:sp>
-      <p:sp>
-        <p:nvSpPr>
-          <p:cNvPr id="3" name="Shape 1"/>
-          <p:cNvSpPr/>
-          <p:nvPr/>
-        </p:nvSpPr>
-        <p:spPr>
-          <a:xfrm>
-            <a:off x="548640" y="1188720"/>
-            <a:ext cx="8046720" cy="3108960"/>
-          </a:xfrm>
-          <a:prstGeom prst="roundRect">
-            <a:avLst>
-              <a:gd name="adj" fmla="val 3529"/>
-            </a:avLst>
-          </a:prstGeom>
-          <a:solidFill>
-            <a:srgbClr val="FFFBEB"/>
-          </a:solidFill>
-          <a:ln w="25400">
-            <a:solidFill>
-              <a:srgbClr val="F59E0B"/>
-            </a:solidFill>
-            <a:prstDash val="solid"/>
-          </a:ln>
-        </p:spPr>
-      </p:sp>
-      <p:sp>
-        <p:nvSpPr>
-          <p:cNvPr id="4" name="Text 2"/>
+      <p:pic>
+        <p:nvPicPr>
+          <p:cNvPr id="3" name="Image 0" descr="Paramos quando a validação deixa de melhorar.">    </p:cNvPr>
+          <p:cNvPicPr>
+            <a:picLocks noChangeAspect="1"/>
+          </p:cNvPicPr>
+          <p:nvPr/>
+        </p:nvPicPr>
+        <p:blipFill>
+          <a:blip r:embed="rId1"/>
+          <a:stretch>
+            <a:fillRect/>
+          </a:stretch>
+        </p:blipFill>
+        <p:spPr>
+          <a:xfrm>
+            <a:off x="870593" y="1005840"/>
+            <a:ext cx="7402815" cy="3154680"/>
+          </a:xfrm>
+          <a:prstGeom prst="rect">
+            <a:avLst/>
+          </a:prstGeom>
+        </p:spPr>
+      </p:pic>
+      <p:sp>
+        <p:nvSpPr>
+          <p:cNvPr id="4" name="Text 1"/>
           <p:cNvSpPr txBox="1"/>
           <p:nvPr/>
         </p:nvSpPr>
         <p:spPr>
           <a:xfrm>
-            <a:off x="822960" y="1325880"/>
-            <a:ext cx="3657600" cy="365760"/>
-          </a:xfrm>
-          <a:prstGeom prst="rect">
-            <a:avLst/>
-          </a:prstGeom>
-          <a:noFill/>
-          <a:ln/>
-        </p:spPr>
-        <p:txBody>
-          <a:bodyPr wrap="square" lIns="0" tIns="0" rIns="0" bIns="0" rtlCol="0" anchor="ctr"/>
-          <a:lstStyle/>
-          <a:p>
-            <a:pPr indent="0" marL="0">
-              <a:buNone/>
-            </a:pPr>
-            <a:r>
-              <a:rPr lang="en-US" sz="1400" b="1" spc="300" kern="0" dirty="0">
-                <a:solidFill>
-                  <a:srgbClr val="B45309"/>
-                </a:solidFill>
-              </a:rPr>
-              <a:t>MÃO NA MASSA</a:t>
-            </a:r>
-            <a:endParaRPr lang="en-US" sz="1400" dirty="0"/>
-          </a:p>
-        </p:txBody>
-      </p:sp>
-      <p:sp>
-        <p:nvSpPr>
-          <p:cNvPr id="5" name="Text 3"/>
-          <p:cNvSpPr txBox="1"/>
-          <p:nvPr/>
-        </p:nvSpPr>
-        <p:spPr>
-          <a:xfrm>
-            <a:off x="822960" y="1783080"/>
-            <a:ext cx="7498080" cy="2377440"/>
+            <a:off x="457200" y="4251960"/>
+            <a:ext cx="8229600" cy="457200"/>
           </a:xfrm>
           <a:prstGeom prst="rect">
             <a:avLst/>
@@ -2293,18 +2788,18 @@
           </a:bodyPr>
           <a:lstStyle/>
           <a:p>
-            <a:pPr indent="0" marL="0">
+            <a:pPr algn="ctr" indent="0" marL="0">
               <a:buNone/>
             </a:pPr>
             <a:r>
-              <a:rPr lang="en-US" sz="2100" dirty="0">
-                <a:solidFill>
-                  <a:srgbClr val="1F2937"/>
-                </a:solidFill>
-              </a:rPr>
-              <a:t>Simule 5 iterações do iRPROP− em E(w) = ½(w−1)² com w(0) = 3 e Δ(0) = 0,5 (g = w−1). Anote w, Δ e o sinal do gradiente em cada iteração.</a:t>
-            </a:r>
-            <a:endParaRPr lang="en-US" sz="2100" dirty="0"/>
+              <a:rPr lang="en-US" sz="1400" i="1" dirty="0">
+                <a:solidFill>
+                  <a:srgbClr val="4B5563"/>
+                </a:solidFill>
+              </a:rPr>
+              <a:t>Paramos quando a validação deixa de melhorar.</a:t>
+            </a:r>
+            <a:endParaRPr lang="en-US" sz="1400" dirty="0"/>
           </a:p>
         </p:txBody>
       </p:sp>
@@ -2386,6 +2881,1450 @@
         </p:nvSpPr>
         <p:spPr>
           <a:xfrm>
+            <a:off x="365760" y="109728"/>
+            <a:ext cx="8412480" cy="658368"/>
+          </a:xfrm>
+          <a:prstGeom prst="rect">
+            <a:avLst/>
+          </a:prstGeom>
+          <a:noFill/>
+          <a:ln/>
+        </p:spPr>
+        <p:txBody>
+          <a:bodyPr wrap="square" lIns="0" tIns="0" rIns="0" bIns="0" rtlCol="0" anchor="ctr">
+            <a:normAutofit/>
+          </a:bodyPr>
+          <a:lstStyle/>
+          <a:p>
+            <a:pPr indent="0" marL="0">
+              <a:buNone/>
+            </a:pPr>
+            <a:r>
+              <a:rPr lang="en-US" sz="2600" b="1" dirty="0">
+                <a:solidFill>
+                  <a:srgbClr val="FFFFFF"/>
+                </a:solidFill>
+                <a:latin typeface="Calibri" pitchFamily="34" charset="0"/>
+                <a:ea typeface="Calibri" pitchFamily="34" charset="-122"/>
+                <a:cs typeface="Calibri" pitchFamily="34" charset="-120"/>
+              </a:rPr>
+              <a:t>Erros frequentes</a:t>
+            </a:r>
+            <a:endParaRPr lang="en-US" sz="2600" dirty="0"/>
+          </a:p>
+        </p:txBody>
+      </p:sp>
+      <p:sp>
+        <p:nvSpPr>
+          <p:cNvPr id="3" name="Text 1"/>
+          <p:cNvSpPr txBox="1"/>
+          <p:nvPr/>
+        </p:nvSpPr>
+        <p:spPr>
+          <a:xfrm>
+            <a:off x="548640" y="1188720"/>
+            <a:ext cx="8046720" cy="3383280"/>
+          </a:xfrm>
+          <a:prstGeom prst="rect">
+            <a:avLst/>
+          </a:prstGeom>
+          <a:noFill/>
+          <a:ln/>
+        </p:spPr>
+        <p:txBody>
+          <a:bodyPr wrap="square" lIns="0" tIns="0" rIns="0" bIns="0" rtlCol="0" anchor="t">
+            <a:normAutofit/>
+          </a:bodyPr>
+          <a:lstStyle/>
+          <a:p>
+            <a:pPr marL="342900" indent="-342900">
+              <a:spcAft>
+                <a:spcPts val="1400"/>
+              </a:spcAft>
+              <a:buSzPct val="100000"/>
+              <a:buChar char="•"/>
+            </a:pPr>
+            <a:r>
+              <a:rPr lang="en-US" sz="2400" dirty="0">
+                <a:solidFill>
+                  <a:srgbClr val="1F2937"/>
+                </a:solidFill>
+              </a:rPr>
+              <a:t>Confundir as variantes (cada uma é uma regra separada)</a:t>
+            </a:r>
+            <a:endParaRPr lang="en-US" sz="2400" dirty="0"/>
+          </a:p>
+          <a:p>
+            <a:pPr marL="342900" indent="-342900">
+              <a:spcAft>
+                <a:spcPts val="1400"/>
+              </a:spcAft>
+              <a:buSzPct val="100000"/>
+              <a:buChar char="•"/>
+            </a:pPr>
+            <a:r>
+              <a:rPr lang="en-US" sz="2400" dirty="0">
+                <a:solidFill>
+                  <a:srgbClr val="1F2937"/>
+                </a:solidFill>
+              </a:rPr>
+              <a:t>Usar RPROP em minilotes ruidosos</a:t>
+            </a:r>
+            <a:endParaRPr lang="en-US" sz="2400" dirty="0"/>
+          </a:p>
+          <a:p>
+            <a:pPr marL="342900" indent="-342900">
+              <a:spcAft>
+                <a:spcPts val="1400"/>
+              </a:spcAft>
+              <a:buSzPct val="100000"/>
+              <a:buChar char="•"/>
+            </a:pPr>
+            <a:r>
+              <a:rPr lang="en-US" sz="2400" dirty="0">
+                <a:solidFill>
+                  <a:srgbClr val="1F2937"/>
+                </a:solidFill>
+              </a:rPr>
+              <a:t>Esquecer os limites Δmin e Δmax</a:t>
+            </a:r>
+            <a:endParaRPr lang="en-US" sz="2400" dirty="0"/>
+          </a:p>
+          <a:p>
+            <a:pPr marL="342900" indent="-342900">
+              <a:spcAft>
+                <a:spcPts val="1400"/>
+              </a:spcAft>
+              <a:buSzPct val="100000"/>
+              <a:buChar char="•"/>
+            </a:pPr>
+            <a:r>
+              <a:rPr lang="en-US" sz="2400" dirty="0">
+                <a:solidFill>
+                  <a:srgbClr val="1F2937"/>
+                </a:solidFill>
+              </a:rPr>
+              <a:t>Reportar a melhor semente</a:t>
+            </a:r>
+            <a:endParaRPr lang="en-US" sz="2400" dirty="0"/>
+          </a:p>
+        </p:txBody>
+      </p:sp>
+      <p:sp>
+        <p:nvSpPr>
+          <p:cNvPr id="25" name="Slide Number Placeholder 0"/>
+          <p:cNvSpPr>
+            <a:spLocks noGrp="1"/>
+          </p:cNvSpPr>
+          <p:nvPr>
+            <p:ph type="sldNum" sz="quarter" idx="4294967295"/>
+          </p:nvPr>
+        </p:nvSpPr>
+        <p:spPr>
+          <a:xfrm>
+            <a:off x="8412480" y="4828032"/>
+            <a:ext cx="457200" cy="228600"/>
+          </a:xfrm>
+          <a:prstGeom prst="rect">
+            <a:avLst/>
+          </a:prstGeom>
+          <a:extLst>
+            <a:ext uri="{C572A759-6A51-4108-AA02-DFA0A04FC94B}">
+              <ma14:wrappingTextBoxFlag xmlns:ma14="http://schemas.microsoft.com/office/mac/drawingml/2011/main" val="0"/>
+            </a:ext>
+          </a:extLst>
+        </p:spPr>
+        <p:txBody>
+          <a:bodyPr/>
+          <a:lstStyle>
+            <a:lvl1pPr>
+              <a:defRPr sz="900">
+                <a:solidFill>
+                  <a:srgbClr val="6B7280"/>
+                </a:solidFill>
+              </a:defRPr>
+            </a:lvl1pPr>
+          </a:lstStyle>
+          <a:p>
+            <a:pPr algn="l"/>
+            <a:fld id="{F7021451-1387-4CA6-816F-3879F97B5CBC}" type="slidenum">
+              <a:rPr b="0" lang="en-US"/>
+              <a:t>11</a:t>
+            </a:fld>
+            <a:endParaRPr lang="en-US"/>
+          </a:p>
+        </p:txBody>
+      </p:sp>
+    </p:spTree>
+  </p:cSld>
+  <p:clrMapOvr>
+    <a:masterClrMapping/>
+  </p:clrMapOvr>
+</p:sld>
+</file>
+
+<file path=ppt/slides/slide12.xml><?xml version="1.0" encoding="utf-8"?>
+<p:sld xmlns:a="http://schemas.openxmlformats.org/drawingml/2006/main" xmlns:r="http://schemas.openxmlformats.org/officeDocument/2006/relationships" xmlns:p="http://schemas.openxmlformats.org/presentationml/2006/main">
+  <p:cSld name="Slide 12">
+    <p:spTree>
+      <p:nvGrpSpPr>
+        <p:cNvPr id="1" name=""/>
+        <p:cNvGrpSpPr/>
+        <p:nvPr/>
+      </p:nvGrpSpPr>
+      <p:grpSpPr>
+        <a:xfrm>
+          <a:off x="0" y="0"/>
+          <a:ext cx="0" cy="0"/>
+          <a:chOff x="0" y="0"/>
+          <a:chExt cx="0" cy="0"/>
+        </a:xfrm>
+      </p:grpSpPr>
+      <p:sp>
+        <p:nvSpPr>
+          <p:cNvPr id="2" name="Text 0"/>
+          <p:cNvSpPr txBox="1"/>
+          <p:nvPr/>
+        </p:nvSpPr>
+        <p:spPr>
+          <a:xfrm>
+            <a:off x="365760" y="109728"/>
+            <a:ext cx="8412480" cy="658368"/>
+          </a:xfrm>
+          <a:prstGeom prst="rect">
+            <a:avLst/>
+          </a:prstGeom>
+          <a:noFill/>
+          <a:ln/>
+        </p:spPr>
+        <p:txBody>
+          <a:bodyPr wrap="square" lIns="0" tIns="0" rIns="0" bIns="0" rtlCol="0" anchor="ctr">
+            <a:normAutofit/>
+          </a:bodyPr>
+          <a:lstStyle/>
+          <a:p>
+            <a:pPr indent="0" marL="0">
+              <a:buNone/>
+            </a:pPr>
+            <a:r>
+              <a:rPr lang="en-US" sz="2600" b="1" dirty="0">
+                <a:solidFill>
+                  <a:srgbClr val="FFFFFF"/>
+                </a:solidFill>
+                <a:latin typeface="Calibri" pitchFamily="34" charset="0"/>
+                <a:ea typeface="Calibri" pitchFamily="34" charset="-122"/>
+                <a:cs typeface="Calibri" pitchFamily="34" charset="-120"/>
+              </a:rPr>
+              <a:t>As quatro variantes</a:t>
+            </a:r>
+            <a:endParaRPr lang="en-US" sz="2600" dirty="0"/>
+          </a:p>
+        </p:txBody>
+      </p:sp>
+      <p:sp>
+        <p:nvSpPr>
+          <p:cNvPr id="3" name="Text 1"/>
+          <p:cNvSpPr txBox="1"/>
+          <p:nvPr/>
+        </p:nvSpPr>
+        <p:spPr>
+          <a:xfrm>
+            <a:off x="548640" y="1188720"/>
+            <a:ext cx="8046720" cy="3383280"/>
+          </a:xfrm>
+          <a:prstGeom prst="rect">
+            <a:avLst/>
+          </a:prstGeom>
+          <a:noFill/>
+          <a:ln/>
+        </p:spPr>
+        <p:txBody>
+          <a:bodyPr wrap="square" lIns="0" tIns="0" rIns="0" bIns="0" rtlCol="0" anchor="t">
+            <a:normAutofit/>
+          </a:bodyPr>
+          <a:lstStyle/>
+          <a:p>
+            <a:pPr marL="342900" indent="-342900">
+              <a:spcAft>
+                <a:spcPts val="1400"/>
+              </a:spcAft>
+              <a:buSzPct val="100000"/>
+              <a:buChar char="•"/>
+            </a:pPr>
+            <a:r>
+              <a:rPr lang="en-US" sz="2400" dirty="0">
+                <a:solidFill>
+                  <a:srgbClr val="1F2937"/>
+                </a:solidFill>
+              </a:rPr>
+              <a:t>RPROP+: desfaz o último passo ao trocar o sinal</a:t>
+            </a:r>
+            <a:endParaRPr lang="en-US" sz="2400" dirty="0"/>
+          </a:p>
+          <a:p>
+            <a:pPr marL="342900" indent="-342900">
+              <a:spcAft>
+                <a:spcPts val="1400"/>
+              </a:spcAft>
+              <a:buSzPct val="100000"/>
+              <a:buChar char="•"/>
+            </a:pPr>
+            <a:r>
+              <a:rPr lang="en-US" sz="2400" dirty="0">
+                <a:solidFill>
+                  <a:srgbClr val="1F2937"/>
+                </a:solidFill>
+              </a:rPr>
+              <a:t>RPROP−: só reduz o passo, sem desfazer</a:t>
+            </a:r>
+            <a:endParaRPr lang="en-US" sz="2400" dirty="0"/>
+          </a:p>
+          <a:p>
+            <a:pPr marL="342900" indent="-342900">
+              <a:spcAft>
+                <a:spcPts val="1400"/>
+              </a:spcAft>
+              <a:buSzPct val="100000"/>
+              <a:buChar char="•"/>
+            </a:pPr>
+            <a:r>
+              <a:rPr lang="en-US" sz="2400" dirty="0">
+                <a:solidFill>
+                  <a:srgbClr val="1F2937"/>
+                </a:solidFill>
+              </a:rPr>
+              <a:t>iRPROP+: desfaz só se o erro aumentou</a:t>
+            </a:r>
+            <a:endParaRPr lang="en-US" sz="2400" dirty="0"/>
+          </a:p>
+          <a:p>
+            <a:pPr marL="342900" indent="-342900">
+              <a:spcAft>
+                <a:spcPts val="1400"/>
+              </a:spcAft>
+              <a:buSzPct val="100000"/>
+              <a:buChar char="•"/>
+            </a:pPr>
+            <a:r>
+              <a:rPr lang="en-US" sz="2400" dirty="0">
+                <a:solidFill>
+                  <a:srgbClr val="1F2937"/>
+                </a:solidFill>
+              </a:rPr>
+              <a:t>iRPROP−: reduz o passo e zera o gradiente</a:t>
+            </a:r>
+            <a:endParaRPr lang="en-US" sz="2400" dirty="0"/>
+          </a:p>
+        </p:txBody>
+      </p:sp>
+      <p:sp>
+        <p:nvSpPr>
+          <p:cNvPr id="25" name="Slide Number Placeholder 0"/>
+          <p:cNvSpPr>
+            <a:spLocks noGrp="1"/>
+          </p:cNvSpPr>
+          <p:nvPr>
+            <p:ph type="sldNum" sz="quarter" idx="4294967295"/>
+          </p:nvPr>
+        </p:nvSpPr>
+        <p:spPr>
+          <a:xfrm>
+            <a:off x="8412480" y="4828032"/>
+            <a:ext cx="457200" cy="228600"/>
+          </a:xfrm>
+          <a:prstGeom prst="rect">
+            <a:avLst/>
+          </a:prstGeom>
+          <a:extLst>
+            <a:ext uri="{C572A759-6A51-4108-AA02-DFA0A04FC94B}">
+              <ma14:wrappingTextBoxFlag xmlns:ma14="http://schemas.microsoft.com/office/mac/drawingml/2011/main" val="0"/>
+            </a:ext>
+          </a:extLst>
+        </p:spPr>
+        <p:txBody>
+          <a:bodyPr/>
+          <a:lstStyle>
+            <a:lvl1pPr>
+              <a:defRPr sz="900">
+                <a:solidFill>
+                  <a:srgbClr val="6B7280"/>
+                </a:solidFill>
+              </a:defRPr>
+            </a:lvl1pPr>
+          </a:lstStyle>
+          <a:p>
+            <a:pPr algn="l"/>
+            <a:fld id="{F7021451-1387-4CA6-816F-3879F97B5CBC}" type="slidenum">
+              <a:rPr b="0" lang="en-US"/>
+              <a:t>12</a:t>
+            </a:fld>
+            <a:endParaRPr lang="en-US"/>
+          </a:p>
+        </p:txBody>
+      </p:sp>
+    </p:spTree>
+  </p:cSld>
+  <p:clrMapOvr>
+    <a:masterClrMapping/>
+  </p:clrMapOvr>
+</p:sld>
+</file>
+
+<file path=ppt/slides/slide13.xml><?xml version="1.0" encoding="utf-8"?>
+<p:sld xmlns:a="http://schemas.openxmlformats.org/drawingml/2006/main" xmlns:r="http://schemas.openxmlformats.org/officeDocument/2006/relationships" xmlns:p="http://schemas.openxmlformats.org/presentationml/2006/main">
+  <p:cSld name="Slide 13">
+    <p:spTree>
+      <p:nvGrpSpPr>
+        <p:cNvPr id="1" name=""/>
+        <p:cNvGrpSpPr/>
+        <p:nvPr/>
+      </p:nvGrpSpPr>
+      <p:grpSpPr>
+        <a:xfrm>
+          <a:off x="0" y="0"/>
+          <a:ext cx="0" cy="0"/>
+          <a:chOff x="0" y="0"/>
+          <a:chExt cx="0" cy="0"/>
+        </a:xfrm>
+      </p:grpSpPr>
+      <p:sp>
+        <p:nvSpPr>
+          <p:cNvPr id="2" name="Text 0"/>
+          <p:cNvSpPr txBox="1"/>
+          <p:nvPr/>
+        </p:nvSpPr>
+        <p:spPr>
+          <a:xfrm>
+            <a:off x="365760" y="109728"/>
+            <a:ext cx="8412480" cy="658368"/>
+          </a:xfrm>
+          <a:prstGeom prst="rect">
+            <a:avLst/>
+          </a:prstGeom>
+          <a:noFill/>
+          <a:ln/>
+        </p:spPr>
+        <p:txBody>
+          <a:bodyPr wrap="square" lIns="0" tIns="0" rIns="0" bIns="0" rtlCol="0" anchor="ctr">
+            <a:normAutofit/>
+          </a:bodyPr>
+          <a:lstStyle/>
+          <a:p>
+            <a:pPr indent="0" marL="0">
+              <a:buNone/>
+            </a:pPr>
+            <a:r>
+              <a:rPr lang="en-US" sz="2600" b="1" dirty="0">
+                <a:solidFill>
+                  <a:srgbClr val="FFFFFF"/>
+                </a:solidFill>
+                <a:latin typeface="Calibri" pitchFamily="34" charset="0"/>
+                <a:ea typeface="Calibri" pitchFamily="34" charset="-122"/>
+                <a:cs typeface="Calibri" pitchFamily="34" charset="-120"/>
+              </a:rPr>
+              <a:t>Quiz relâmpago 1</a:t>
+            </a:r>
+            <a:endParaRPr lang="en-US" sz="2600" dirty="0"/>
+          </a:p>
+        </p:txBody>
+      </p:sp>
+      <p:sp>
+        <p:nvSpPr>
+          <p:cNvPr id="3" name="Text 1"/>
+          <p:cNvSpPr txBox="1"/>
+          <p:nvPr/>
+        </p:nvSpPr>
+        <p:spPr>
+          <a:xfrm>
+            <a:off x="548640" y="1051560"/>
+            <a:ext cx="8046720" cy="822960"/>
+          </a:xfrm>
+          <a:prstGeom prst="rect">
+            <a:avLst/>
+          </a:prstGeom>
+          <a:noFill/>
+          <a:ln/>
+        </p:spPr>
+        <p:txBody>
+          <a:bodyPr wrap="square" lIns="0" tIns="0" rIns="0" bIns="0" rtlCol="0" anchor="ctr">
+            <a:normAutofit/>
+          </a:bodyPr>
+          <a:lstStyle/>
+          <a:p>
+            <a:pPr indent="0" marL="0">
+              <a:buNone/>
+            </a:pPr>
+            <a:r>
+              <a:rPr lang="en-US" sz="2200" b="1" dirty="0">
+                <a:solidFill>
+                  <a:srgbClr val="312E81"/>
+                </a:solidFill>
+              </a:rPr>
+              <a:t>O RPROP usa do gradiente:</a:t>
+            </a:r>
+            <a:endParaRPr lang="en-US" sz="2200" dirty="0"/>
+          </a:p>
+        </p:txBody>
+      </p:sp>
+      <p:sp>
+        <p:nvSpPr>
+          <p:cNvPr id="4" name="Shape 2"/>
+          <p:cNvSpPr/>
+          <p:nvPr/>
+        </p:nvSpPr>
+        <p:spPr>
+          <a:xfrm>
+            <a:off x="548640" y="1965960"/>
+            <a:ext cx="8046720" cy="548640"/>
+          </a:xfrm>
+          <a:prstGeom prst="roundRect">
+            <a:avLst>
+              <a:gd name="adj" fmla="val 13333"/>
+            </a:avLst>
+          </a:prstGeom>
+          <a:solidFill>
+            <a:srgbClr val="EEF2FF"/>
+          </a:solidFill>
+          <a:ln w="12700">
+            <a:solidFill>
+              <a:srgbClr val="C7D2FE"/>
+            </a:solidFill>
+            <a:prstDash val="solid"/>
+          </a:ln>
+        </p:spPr>
+      </p:sp>
+      <p:sp>
+        <p:nvSpPr>
+          <p:cNvPr id="5" name="Text 3"/>
+          <p:cNvSpPr txBox="1"/>
+          <p:nvPr/>
+        </p:nvSpPr>
+        <p:spPr>
+          <a:xfrm>
+            <a:off x="777240" y="1965960"/>
+            <a:ext cx="7680960" cy="548640"/>
+          </a:xfrm>
+          <a:prstGeom prst="rect">
+            <a:avLst/>
+          </a:prstGeom>
+          <a:noFill/>
+          <a:ln/>
+        </p:spPr>
+        <p:txBody>
+          <a:bodyPr wrap="square" lIns="0" tIns="0" rIns="0" bIns="0" rtlCol="0" anchor="ctr">
+            <a:normAutofit/>
+          </a:bodyPr>
+          <a:lstStyle/>
+          <a:p>
+            <a:pPr indent="0" marL="0">
+              <a:buNone/>
+            </a:pPr>
+            <a:r>
+              <a:rPr lang="en-US" sz="1800" dirty="0">
+                <a:solidFill>
+                  <a:srgbClr val="1F2937"/>
+                </a:solidFill>
+              </a:rPr>
+              <a:t>A)  Apenas o sinal</a:t>
+            </a:r>
+            <a:endParaRPr lang="en-US" sz="1800" dirty="0"/>
+          </a:p>
+        </p:txBody>
+      </p:sp>
+      <p:sp>
+        <p:nvSpPr>
+          <p:cNvPr id="6" name="Shape 4"/>
+          <p:cNvSpPr/>
+          <p:nvPr/>
+        </p:nvSpPr>
+        <p:spPr>
+          <a:xfrm>
+            <a:off x="548640" y="2606040"/>
+            <a:ext cx="8046720" cy="548640"/>
+          </a:xfrm>
+          <a:prstGeom prst="roundRect">
+            <a:avLst>
+              <a:gd name="adj" fmla="val 13333"/>
+            </a:avLst>
+          </a:prstGeom>
+          <a:solidFill>
+            <a:srgbClr val="EEF2FF"/>
+          </a:solidFill>
+          <a:ln w="12700">
+            <a:solidFill>
+              <a:srgbClr val="C7D2FE"/>
+            </a:solidFill>
+            <a:prstDash val="solid"/>
+          </a:ln>
+        </p:spPr>
+      </p:sp>
+      <p:sp>
+        <p:nvSpPr>
+          <p:cNvPr id="7" name="Text 5"/>
+          <p:cNvSpPr txBox="1"/>
+          <p:nvPr/>
+        </p:nvSpPr>
+        <p:spPr>
+          <a:xfrm>
+            <a:off x="777240" y="2606040"/>
+            <a:ext cx="7680960" cy="548640"/>
+          </a:xfrm>
+          <a:prstGeom prst="rect">
+            <a:avLst/>
+          </a:prstGeom>
+          <a:noFill/>
+          <a:ln/>
+        </p:spPr>
+        <p:txBody>
+          <a:bodyPr wrap="square" lIns="0" tIns="0" rIns="0" bIns="0" rtlCol="0" anchor="ctr">
+            <a:normAutofit/>
+          </a:bodyPr>
+          <a:lstStyle/>
+          <a:p>
+            <a:pPr indent="0" marL="0">
+              <a:buNone/>
+            </a:pPr>
+            <a:r>
+              <a:rPr lang="en-US" sz="1800" dirty="0">
+                <a:solidFill>
+                  <a:srgbClr val="1F2937"/>
+                </a:solidFill>
+              </a:rPr>
+              <a:t>B)  Apenas o módulo</a:t>
+            </a:r>
+            <a:endParaRPr lang="en-US" sz="1800" dirty="0"/>
+          </a:p>
+        </p:txBody>
+      </p:sp>
+      <p:sp>
+        <p:nvSpPr>
+          <p:cNvPr id="8" name="Shape 6"/>
+          <p:cNvSpPr/>
+          <p:nvPr/>
+        </p:nvSpPr>
+        <p:spPr>
+          <a:xfrm>
+            <a:off x="548640" y="3246120"/>
+            <a:ext cx="8046720" cy="548640"/>
+          </a:xfrm>
+          <a:prstGeom prst="roundRect">
+            <a:avLst>
+              <a:gd name="adj" fmla="val 13333"/>
+            </a:avLst>
+          </a:prstGeom>
+          <a:solidFill>
+            <a:srgbClr val="EEF2FF"/>
+          </a:solidFill>
+          <a:ln w="12700">
+            <a:solidFill>
+              <a:srgbClr val="C7D2FE"/>
+            </a:solidFill>
+            <a:prstDash val="solid"/>
+          </a:ln>
+        </p:spPr>
+      </p:sp>
+      <p:sp>
+        <p:nvSpPr>
+          <p:cNvPr id="9" name="Text 7"/>
+          <p:cNvSpPr txBox="1"/>
+          <p:nvPr/>
+        </p:nvSpPr>
+        <p:spPr>
+          <a:xfrm>
+            <a:off x="777240" y="3246120"/>
+            <a:ext cx="7680960" cy="548640"/>
+          </a:xfrm>
+          <a:prstGeom prst="rect">
+            <a:avLst/>
+          </a:prstGeom>
+          <a:noFill/>
+          <a:ln/>
+        </p:spPr>
+        <p:txBody>
+          <a:bodyPr wrap="square" lIns="0" tIns="0" rIns="0" bIns="0" rtlCol="0" anchor="ctr">
+            <a:normAutofit/>
+          </a:bodyPr>
+          <a:lstStyle/>
+          <a:p>
+            <a:pPr indent="0" marL="0">
+              <a:buNone/>
+            </a:pPr>
+            <a:r>
+              <a:rPr lang="en-US" sz="1800" dirty="0">
+                <a:solidFill>
+                  <a:srgbClr val="1F2937"/>
+                </a:solidFill>
+              </a:rPr>
+              <a:t>C)  O módulo e o sinal</a:t>
+            </a:r>
+            <a:endParaRPr lang="en-US" sz="1800" dirty="0"/>
+          </a:p>
+        </p:txBody>
+      </p:sp>
+      <p:sp>
+        <p:nvSpPr>
+          <p:cNvPr id="10" name="Shape 8"/>
+          <p:cNvSpPr/>
+          <p:nvPr/>
+        </p:nvSpPr>
+        <p:spPr>
+          <a:xfrm>
+            <a:off x="548640" y="3886200"/>
+            <a:ext cx="8046720" cy="548640"/>
+          </a:xfrm>
+          <a:prstGeom prst="roundRect">
+            <a:avLst>
+              <a:gd name="adj" fmla="val 13333"/>
+            </a:avLst>
+          </a:prstGeom>
+          <a:solidFill>
+            <a:srgbClr val="EEF2FF"/>
+          </a:solidFill>
+          <a:ln w="12700">
+            <a:solidFill>
+              <a:srgbClr val="C7D2FE"/>
+            </a:solidFill>
+            <a:prstDash val="solid"/>
+          </a:ln>
+        </p:spPr>
+      </p:sp>
+      <p:sp>
+        <p:nvSpPr>
+          <p:cNvPr id="11" name="Text 9"/>
+          <p:cNvSpPr txBox="1"/>
+          <p:nvPr/>
+        </p:nvSpPr>
+        <p:spPr>
+          <a:xfrm>
+            <a:off x="777240" y="3886200"/>
+            <a:ext cx="7680960" cy="548640"/>
+          </a:xfrm>
+          <a:prstGeom prst="rect">
+            <a:avLst/>
+          </a:prstGeom>
+          <a:noFill/>
+          <a:ln/>
+        </p:spPr>
+        <p:txBody>
+          <a:bodyPr wrap="square" lIns="0" tIns="0" rIns="0" bIns="0" rtlCol="0" anchor="ctr">
+            <a:normAutofit/>
+          </a:bodyPr>
+          <a:lstStyle/>
+          <a:p>
+            <a:pPr indent="0" marL="0">
+              <a:buNone/>
+            </a:pPr>
+            <a:r>
+              <a:rPr lang="en-US" sz="1800" dirty="0">
+                <a:solidFill>
+                  <a:srgbClr val="1F2937"/>
+                </a:solidFill>
+              </a:rPr>
+              <a:t>D)  Só a segunda derivada</a:t>
+            </a:r>
+            <a:endParaRPr lang="en-US" sz="1800" dirty="0"/>
+          </a:p>
+        </p:txBody>
+      </p:sp>
+      <p:sp>
+        <p:nvSpPr>
+          <p:cNvPr id="25" name="Slide Number Placeholder 0"/>
+          <p:cNvSpPr>
+            <a:spLocks noGrp="1"/>
+          </p:cNvSpPr>
+          <p:nvPr>
+            <p:ph type="sldNum" sz="quarter" idx="4294967295"/>
+          </p:nvPr>
+        </p:nvSpPr>
+        <p:spPr>
+          <a:xfrm>
+            <a:off x="8412480" y="4828032"/>
+            <a:ext cx="457200" cy="228600"/>
+          </a:xfrm>
+          <a:prstGeom prst="rect">
+            <a:avLst/>
+          </a:prstGeom>
+          <a:extLst>
+            <a:ext uri="{C572A759-6A51-4108-AA02-DFA0A04FC94B}">
+              <ma14:wrappingTextBoxFlag xmlns:ma14="http://schemas.microsoft.com/office/mac/drawingml/2011/main" val="0"/>
+            </a:ext>
+          </a:extLst>
+        </p:spPr>
+        <p:txBody>
+          <a:bodyPr/>
+          <a:lstStyle>
+            <a:lvl1pPr>
+              <a:defRPr sz="900">
+                <a:solidFill>
+                  <a:srgbClr val="6B7280"/>
+                </a:solidFill>
+              </a:defRPr>
+            </a:lvl1pPr>
+          </a:lstStyle>
+          <a:p>
+            <a:pPr algn="l"/>
+            <a:fld id="{F7021451-1387-4CA6-816F-3879F97B5CBC}" type="slidenum">
+              <a:rPr b="0" lang="en-US"/>
+              <a:t>13</a:t>
+            </a:fld>
+            <a:endParaRPr lang="en-US"/>
+          </a:p>
+        </p:txBody>
+      </p:sp>
+    </p:spTree>
+  </p:cSld>
+  <p:clrMapOvr>
+    <a:masterClrMapping/>
+  </p:clrMapOvr>
+</p:sld>
+</file>
+
+<file path=ppt/slides/slide14.xml><?xml version="1.0" encoding="utf-8"?>
+<p:sld xmlns:a="http://schemas.openxmlformats.org/drawingml/2006/main" xmlns:r="http://schemas.openxmlformats.org/officeDocument/2006/relationships" xmlns:p="http://schemas.openxmlformats.org/presentationml/2006/main">
+  <p:cSld name="Slide 14">
+    <p:spTree>
+      <p:nvGrpSpPr>
+        <p:cNvPr id="1" name=""/>
+        <p:cNvGrpSpPr/>
+        <p:nvPr/>
+      </p:nvGrpSpPr>
+      <p:grpSpPr>
+        <a:xfrm>
+          <a:off x="0" y="0"/>
+          <a:ext cx="0" cy="0"/>
+          <a:chOff x="0" y="0"/>
+          <a:chExt cx="0" cy="0"/>
+        </a:xfrm>
+      </p:grpSpPr>
+      <p:sp>
+        <p:nvSpPr>
+          <p:cNvPr id="2" name="Text 0"/>
+          <p:cNvSpPr txBox="1"/>
+          <p:nvPr/>
+        </p:nvSpPr>
+        <p:spPr>
+          <a:xfrm>
+            <a:off x="365760" y="109728"/>
+            <a:ext cx="8412480" cy="658368"/>
+          </a:xfrm>
+          <a:prstGeom prst="rect">
+            <a:avLst/>
+          </a:prstGeom>
+          <a:noFill/>
+          <a:ln/>
+        </p:spPr>
+        <p:txBody>
+          <a:bodyPr wrap="square" lIns="0" tIns="0" rIns="0" bIns="0" rtlCol="0" anchor="ctr">
+            <a:normAutofit/>
+          </a:bodyPr>
+          <a:lstStyle/>
+          <a:p>
+            <a:pPr indent="0" marL="0">
+              <a:buNone/>
+            </a:pPr>
+            <a:r>
+              <a:rPr lang="en-US" sz="2600" b="1" dirty="0">
+                <a:solidFill>
+                  <a:srgbClr val="FFFFFF"/>
+                </a:solidFill>
+                <a:latin typeface="Calibri" pitchFamily="34" charset="0"/>
+                <a:ea typeface="Calibri" pitchFamily="34" charset="-122"/>
+                <a:cs typeface="Calibri" pitchFamily="34" charset="-120"/>
+              </a:rPr>
+              <a:t>Quiz relâmpago 2</a:t>
+            </a:r>
+            <a:endParaRPr lang="en-US" sz="2600" dirty="0"/>
+          </a:p>
+        </p:txBody>
+      </p:sp>
+      <p:sp>
+        <p:nvSpPr>
+          <p:cNvPr id="3" name="Text 1"/>
+          <p:cNvSpPr txBox="1"/>
+          <p:nvPr/>
+        </p:nvSpPr>
+        <p:spPr>
+          <a:xfrm>
+            <a:off x="548640" y="1051560"/>
+            <a:ext cx="8046720" cy="822960"/>
+          </a:xfrm>
+          <a:prstGeom prst="rect">
+            <a:avLst/>
+          </a:prstGeom>
+          <a:noFill/>
+          <a:ln/>
+        </p:spPr>
+        <p:txBody>
+          <a:bodyPr wrap="square" lIns="0" tIns="0" rIns="0" bIns="0" rtlCol="0" anchor="ctr">
+            <a:normAutofit/>
+          </a:bodyPr>
+          <a:lstStyle/>
+          <a:p>
+            <a:pPr indent="0" marL="0">
+              <a:buNone/>
+            </a:pPr>
+            <a:r>
+              <a:rPr lang="en-US" sz="2200" b="1" dirty="0">
+                <a:solidFill>
+                  <a:srgbClr val="312E81"/>
+                </a:solidFill>
+              </a:rPr>
+              <a:t>Quando o sinal do gradiente de um peso muda, o passo individual é:</a:t>
+            </a:r>
+            <a:endParaRPr lang="en-US" sz="2200" dirty="0"/>
+          </a:p>
+        </p:txBody>
+      </p:sp>
+      <p:sp>
+        <p:nvSpPr>
+          <p:cNvPr id="4" name="Shape 2"/>
+          <p:cNvSpPr/>
+          <p:nvPr/>
+        </p:nvSpPr>
+        <p:spPr>
+          <a:xfrm>
+            <a:off x="548640" y="1965960"/>
+            <a:ext cx="8046720" cy="548640"/>
+          </a:xfrm>
+          <a:prstGeom prst="roundRect">
+            <a:avLst>
+              <a:gd name="adj" fmla="val 13333"/>
+            </a:avLst>
+          </a:prstGeom>
+          <a:solidFill>
+            <a:srgbClr val="EEF2FF"/>
+          </a:solidFill>
+          <a:ln w="12700">
+            <a:solidFill>
+              <a:srgbClr val="C7D2FE"/>
+            </a:solidFill>
+            <a:prstDash val="solid"/>
+          </a:ln>
+        </p:spPr>
+      </p:sp>
+      <p:sp>
+        <p:nvSpPr>
+          <p:cNvPr id="5" name="Text 3"/>
+          <p:cNvSpPr txBox="1"/>
+          <p:nvPr/>
+        </p:nvSpPr>
+        <p:spPr>
+          <a:xfrm>
+            <a:off x="777240" y="1965960"/>
+            <a:ext cx="7680960" cy="548640"/>
+          </a:xfrm>
+          <a:prstGeom prst="rect">
+            <a:avLst/>
+          </a:prstGeom>
+          <a:noFill/>
+          <a:ln/>
+        </p:spPr>
+        <p:txBody>
+          <a:bodyPr wrap="square" lIns="0" tIns="0" rIns="0" bIns="0" rtlCol="0" anchor="ctr">
+            <a:normAutofit/>
+          </a:bodyPr>
+          <a:lstStyle/>
+          <a:p>
+            <a:pPr indent="0" marL="0">
+              <a:buNone/>
+            </a:pPr>
+            <a:r>
+              <a:rPr lang="en-US" sz="1800" dirty="0">
+                <a:solidFill>
+                  <a:srgbClr val="1F2937"/>
+                </a:solidFill>
+              </a:rPr>
+              <a:t>A)  Reduzido (× 0,5)</a:t>
+            </a:r>
+            <a:endParaRPr lang="en-US" sz="1800" dirty="0"/>
+          </a:p>
+        </p:txBody>
+      </p:sp>
+      <p:sp>
+        <p:nvSpPr>
+          <p:cNvPr id="6" name="Shape 4"/>
+          <p:cNvSpPr/>
+          <p:nvPr/>
+        </p:nvSpPr>
+        <p:spPr>
+          <a:xfrm>
+            <a:off x="548640" y="2606040"/>
+            <a:ext cx="8046720" cy="548640"/>
+          </a:xfrm>
+          <a:prstGeom prst="roundRect">
+            <a:avLst>
+              <a:gd name="adj" fmla="val 13333"/>
+            </a:avLst>
+          </a:prstGeom>
+          <a:solidFill>
+            <a:srgbClr val="EEF2FF"/>
+          </a:solidFill>
+          <a:ln w="12700">
+            <a:solidFill>
+              <a:srgbClr val="C7D2FE"/>
+            </a:solidFill>
+            <a:prstDash val="solid"/>
+          </a:ln>
+        </p:spPr>
+      </p:sp>
+      <p:sp>
+        <p:nvSpPr>
+          <p:cNvPr id="7" name="Text 5"/>
+          <p:cNvSpPr txBox="1"/>
+          <p:nvPr/>
+        </p:nvSpPr>
+        <p:spPr>
+          <a:xfrm>
+            <a:off x="777240" y="2606040"/>
+            <a:ext cx="7680960" cy="548640"/>
+          </a:xfrm>
+          <a:prstGeom prst="rect">
+            <a:avLst/>
+          </a:prstGeom>
+          <a:noFill/>
+          <a:ln/>
+        </p:spPr>
+        <p:txBody>
+          <a:bodyPr wrap="square" lIns="0" tIns="0" rIns="0" bIns="0" rtlCol="0" anchor="ctr">
+            <a:normAutofit/>
+          </a:bodyPr>
+          <a:lstStyle/>
+          <a:p>
+            <a:pPr indent="0" marL="0">
+              <a:buNone/>
+            </a:pPr>
+            <a:r>
+              <a:rPr lang="en-US" sz="1800" dirty="0">
+                <a:solidFill>
+                  <a:srgbClr val="1F2937"/>
+                </a:solidFill>
+              </a:rPr>
+              <a:t>B)  Aumentado (× 1,2)</a:t>
+            </a:r>
+            <a:endParaRPr lang="en-US" sz="1800" dirty="0"/>
+          </a:p>
+        </p:txBody>
+      </p:sp>
+      <p:sp>
+        <p:nvSpPr>
+          <p:cNvPr id="8" name="Shape 6"/>
+          <p:cNvSpPr/>
+          <p:nvPr/>
+        </p:nvSpPr>
+        <p:spPr>
+          <a:xfrm>
+            <a:off x="548640" y="3246120"/>
+            <a:ext cx="8046720" cy="548640"/>
+          </a:xfrm>
+          <a:prstGeom prst="roundRect">
+            <a:avLst>
+              <a:gd name="adj" fmla="val 13333"/>
+            </a:avLst>
+          </a:prstGeom>
+          <a:solidFill>
+            <a:srgbClr val="EEF2FF"/>
+          </a:solidFill>
+          <a:ln w="12700">
+            <a:solidFill>
+              <a:srgbClr val="C7D2FE"/>
+            </a:solidFill>
+            <a:prstDash val="solid"/>
+          </a:ln>
+        </p:spPr>
+      </p:sp>
+      <p:sp>
+        <p:nvSpPr>
+          <p:cNvPr id="9" name="Text 7"/>
+          <p:cNvSpPr txBox="1"/>
+          <p:nvPr/>
+        </p:nvSpPr>
+        <p:spPr>
+          <a:xfrm>
+            <a:off x="777240" y="3246120"/>
+            <a:ext cx="7680960" cy="548640"/>
+          </a:xfrm>
+          <a:prstGeom prst="rect">
+            <a:avLst/>
+          </a:prstGeom>
+          <a:noFill/>
+          <a:ln/>
+        </p:spPr>
+        <p:txBody>
+          <a:bodyPr wrap="square" lIns="0" tIns="0" rIns="0" bIns="0" rtlCol="0" anchor="ctr">
+            <a:normAutofit/>
+          </a:bodyPr>
+          <a:lstStyle/>
+          <a:p>
+            <a:pPr indent="0" marL="0">
+              <a:buNone/>
+            </a:pPr>
+            <a:r>
+              <a:rPr lang="en-US" sz="1800" dirty="0">
+                <a:solidFill>
+                  <a:srgbClr val="1F2937"/>
+                </a:solidFill>
+              </a:rPr>
+              <a:t>C)  Mantido</a:t>
+            </a:r>
+            <a:endParaRPr lang="en-US" sz="1800" dirty="0"/>
+          </a:p>
+        </p:txBody>
+      </p:sp>
+      <p:sp>
+        <p:nvSpPr>
+          <p:cNvPr id="10" name="Shape 8"/>
+          <p:cNvSpPr/>
+          <p:nvPr/>
+        </p:nvSpPr>
+        <p:spPr>
+          <a:xfrm>
+            <a:off x="548640" y="3886200"/>
+            <a:ext cx="8046720" cy="548640"/>
+          </a:xfrm>
+          <a:prstGeom prst="roundRect">
+            <a:avLst>
+              <a:gd name="adj" fmla="val 13333"/>
+            </a:avLst>
+          </a:prstGeom>
+          <a:solidFill>
+            <a:srgbClr val="EEF2FF"/>
+          </a:solidFill>
+          <a:ln w="12700">
+            <a:solidFill>
+              <a:srgbClr val="C7D2FE"/>
+            </a:solidFill>
+            <a:prstDash val="solid"/>
+          </a:ln>
+        </p:spPr>
+      </p:sp>
+      <p:sp>
+        <p:nvSpPr>
+          <p:cNvPr id="11" name="Text 9"/>
+          <p:cNvSpPr txBox="1"/>
+          <p:nvPr/>
+        </p:nvSpPr>
+        <p:spPr>
+          <a:xfrm>
+            <a:off x="777240" y="3886200"/>
+            <a:ext cx="7680960" cy="548640"/>
+          </a:xfrm>
+          <a:prstGeom prst="rect">
+            <a:avLst/>
+          </a:prstGeom>
+          <a:noFill/>
+          <a:ln/>
+        </p:spPr>
+        <p:txBody>
+          <a:bodyPr wrap="square" lIns="0" tIns="0" rIns="0" bIns="0" rtlCol="0" anchor="ctr">
+            <a:normAutofit/>
+          </a:bodyPr>
+          <a:lstStyle/>
+          <a:p>
+            <a:pPr indent="0" marL="0">
+              <a:buNone/>
+            </a:pPr>
+            <a:r>
+              <a:rPr lang="en-US" sz="1800" dirty="0">
+                <a:solidFill>
+                  <a:srgbClr val="1F2937"/>
+                </a:solidFill>
+              </a:rPr>
+              <a:t>D)  Zerado para sempre</a:t>
+            </a:r>
+            <a:endParaRPr lang="en-US" sz="1800" dirty="0"/>
+          </a:p>
+        </p:txBody>
+      </p:sp>
+      <p:sp>
+        <p:nvSpPr>
+          <p:cNvPr id="25" name="Slide Number Placeholder 0"/>
+          <p:cNvSpPr>
+            <a:spLocks noGrp="1"/>
+          </p:cNvSpPr>
+          <p:nvPr>
+            <p:ph type="sldNum" sz="quarter" idx="4294967295"/>
+          </p:nvPr>
+        </p:nvSpPr>
+        <p:spPr>
+          <a:xfrm>
+            <a:off x="8412480" y="4828032"/>
+            <a:ext cx="457200" cy="228600"/>
+          </a:xfrm>
+          <a:prstGeom prst="rect">
+            <a:avLst/>
+          </a:prstGeom>
+          <a:extLst>
+            <a:ext uri="{C572A759-6A51-4108-AA02-DFA0A04FC94B}">
+              <ma14:wrappingTextBoxFlag xmlns:ma14="http://schemas.microsoft.com/office/mac/drawingml/2011/main" val="0"/>
+            </a:ext>
+          </a:extLst>
+        </p:spPr>
+        <p:txBody>
+          <a:bodyPr/>
+          <a:lstStyle>
+            <a:lvl1pPr>
+              <a:defRPr sz="900">
+                <a:solidFill>
+                  <a:srgbClr val="6B7280"/>
+                </a:solidFill>
+              </a:defRPr>
+            </a:lvl1pPr>
+          </a:lstStyle>
+          <a:p>
+            <a:pPr algn="l"/>
+            <a:fld id="{F7021451-1387-4CA6-816F-3879F97B5CBC}" type="slidenum">
+              <a:rPr b="0" lang="en-US"/>
+              <a:t>14</a:t>
+            </a:fld>
+            <a:endParaRPr lang="en-US"/>
+          </a:p>
+        </p:txBody>
+      </p:sp>
+    </p:spTree>
+  </p:cSld>
+  <p:clrMapOvr>
+    <a:masterClrMapping/>
+  </p:clrMapOvr>
+</p:sld>
+</file>
+
+<file path=ppt/slides/slide15.xml><?xml version="1.0" encoding="utf-8"?>
+<p:sld xmlns:a="http://schemas.openxmlformats.org/drawingml/2006/main" xmlns:r="http://schemas.openxmlformats.org/officeDocument/2006/relationships" xmlns:p="http://schemas.openxmlformats.org/presentationml/2006/main">
+  <p:cSld name="Slide 15">
+    <p:spTree>
+      <p:nvGrpSpPr>
+        <p:cNvPr id="1" name=""/>
+        <p:cNvGrpSpPr/>
+        <p:nvPr/>
+      </p:nvGrpSpPr>
+      <p:grpSpPr>
+        <a:xfrm>
+          <a:off x="0" y="0"/>
+          <a:ext cx="0" cy="0"/>
+          <a:chOff x="0" y="0"/>
+          <a:chExt cx="0" cy="0"/>
+        </a:xfrm>
+      </p:grpSpPr>
+      <p:sp>
+        <p:nvSpPr>
+          <p:cNvPr id="2" name="Text 0"/>
+          <p:cNvSpPr txBox="1"/>
+          <p:nvPr/>
+        </p:nvSpPr>
+        <p:spPr>
+          <a:xfrm>
+            <a:off x="365760" y="109728"/>
+            <a:ext cx="8412480" cy="658368"/>
+          </a:xfrm>
+          <a:prstGeom prst="rect">
+            <a:avLst/>
+          </a:prstGeom>
+          <a:noFill/>
+          <a:ln/>
+        </p:spPr>
+        <p:txBody>
+          <a:bodyPr wrap="square" lIns="0" tIns="0" rIns="0" bIns="0" rtlCol="0" anchor="ctr">
+            <a:normAutofit/>
+          </a:bodyPr>
+          <a:lstStyle/>
+          <a:p>
+            <a:pPr indent="0" marL="0">
+              <a:buNone/>
+            </a:pPr>
+            <a:r>
+              <a:rPr lang="en-US" sz="2600" b="1" dirty="0">
+                <a:solidFill>
+                  <a:srgbClr val="FFFFFF"/>
+                </a:solidFill>
+                <a:latin typeface="Calibri" pitchFamily="34" charset="0"/>
+                <a:ea typeface="Calibri" pitchFamily="34" charset="-122"/>
+                <a:cs typeface="Calibri" pitchFamily="34" charset="-120"/>
+              </a:rPr>
+              <a:t>Atividade</a:t>
+            </a:r>
+            <a:endParaRPr lang="en-US" sz="2600" dirty="0"/>
+          </a:p>
+        </p:txBody>
+      </p:sp>
+      <p:sp>
+        <p:nvSpPr>
+          <p:cNvPr id="3" name="Shape 1"/>
+          <p:cNvSpPr/>
+          <p:nvPr/>
+        </p:nvSpPr>
+        <p:spPr>
+          <a:xfrm>
+            <a:off x="548640" y="1188720"/>
+            <a:ext cx="8046720" cy="3108960"/>
+          </a:xfrm>
+          <a:prstGeom prst="roundRect">
+            <a:avLst>
+              <a:gd name="adj" fmla="val 3529"/>
+            </a:avLst>
+          </a:prstGeom>
+          <a:solidFill>
+            <a:srgbClr val="FFFBEB"/>
+          </a:solidFill>
+          <a:ln w="25400">
+            <a:solidFill>
+              <a:srgbClr val="F59E0B"/>
+            </a:solidFill>
+            <a:prstDash val="solid"/>
+          </a:ln>
+        </p:spPr>
+      </p:sp>
+      <p:sp>
+        <p:nvSpPr>
+          <p:cNvPr id="4" name="Text 2"/>
+          <p:cNvSpPr txBox="1"/>
+          <p:nvPr/>
+        </p:nvSpPr>
+        <p:spPr>
+          <a:xfrm>
+            <a:off x="822960" y="1325880"/>
+            <a:ext cx="3657600" cy="365760"/>
+          </a:xfrm>
+          <a:prstGeom prst="rect">
+            <a:avLst/>
+          </a:prstGeom>
+          <a:noFill/>
+          <a:ln/>
+        </p:spPr>
+        <p:txBody>
+          <a:bodyPr wrap="square" lIns="0" tIns="0" rIns="0" bIns="0" rtlCol="0" anchor="ctr"/>
+          <a:lstStyle/>
+          <a:p>
+            <a:pPr indent="0" marL="0">
+              <a:buNone/>
+            </a:pPr>
+            <a:r>
+              <a:rPr lang="en-US" sz="1400" b="1" spc="300" kern="0" dirty="0">
+                <a:solidFill>
+                  <a:srgbClr val="B45309"/>
+                </a:solidFill>
+              </a:rPr>
+              <a:t>MÃO NA MASSA</a:t>
+            </a:r>
+            <a:endParaRPr lang="en-US" sz="1400" dirty="0"/>
+          </a:p>
+        </p:txBody>
+      </p:sp>
+      <p:sp>
+        <p:nvSpPr>
+          <p:cNvPr id="5" name="Text 3"/>
+          <p:cNvSpPr txBox="1"/>
+          <p:nvPr/>
+        </p:nvSpPr>
+        <p:spPr>
+          <a:xfrm>
+            <a:off x="822960" y="1783080"/>
+            <a:ext cx="7498080" cy="2377440"/>
+          </a:xfrm>
+          <a:prstGeom prst="rect">
+            <a:avLst/>
+          </a:prstGeom>
+          <a:noFill/>
+          <a:ln/>
+        </p:spPr>
+        <p:txBody>
+          <a:bodyPr wrap="square" lIns="0" tIns="0" rIns="0" bIns="0" rtlCol="0" anchor="t">
+            <a:normAutofit/>
+          </a:bodyPr>
+          <a:lstStyle/>
+          <a:p>
+            <a:pPr indent="0" marL="0">
+              <a:buNone/>
+            </a:pPr>
+            <a:r>
+              <a:rPr lang="en-US" sz="2100" dirty="0">
+                <a:solidFill>
+                  <a:srgbClr val="1F2937"/>
+                </a:solidFill>
+              </a:rPr>
+              <a:t>Simule 5 iterações do iRPROP− em E(w) = ½(w−1)² com w(0) = 3 e Δ(0) = 0,5 (g = w−1). Anote w, Δ e o sinal do gradiente em cada iteração.</a:t>
+            </a:r>
+            <a:endParaRPr lang="en-US" sz="2100" dirty="0"/>
+          </a:p>
+        </p:txBody>
+      </p:sp>
+      <p:sp>
+        <p:nvSpPr>
+          <p:cNvPr id="25" name="Slide Number Placeholder 0"/>
+          <p:cNvSpPr>
+            <a:spLocks noGrp="1"/>
+          </p:cNvSpPr>
+          <p:nvPr>
+            <p:ph type="sldNum" sz="quarter" idx="4294967295"/>
+          </p:nvPr>
+        </p:nvSpPr>
+        <p:spPr>
+          <a:xfrm>
+            <a:off x="8412480" y="4828032"/>
+            <a:ext cx="457200" cy="228600"/>
+          </a:xfrm>
+          <a:prstGeom prst="rect">
+            <a:avLst/>
+          </a:prstGeom>
+          <a:extLst>
+            <a:ext uri="{C572A759-6A51-4108-AA02-DFA0A04FC94B}">
+              <ma14:wrappingTextBoxFlag xmlns:ma14="http://schemas.microsoft.com/office/mac/drawingml/2011/main" val="0"/>
+            </a:ext>
+          </a:extLst>
+        </p:spPr>
+        <p:txBody>
+          <a:bodyPr/>
+          <a:lstStyle>
+            <a:lvl1pPr>
+              <a:defRPr sz="900">
+                <a:solidFill>
+                  <a:srgbClr val="6B7280"/>
+                </a:solidFill>
+              </a:defRPr>
+            </a:lvl1pPr>
+          </a:lstStyle>
+          <a:p>
+            <a:pPr algn="l"/>
+            <a:fld id="{F7021451-1387-4CA6-816F-3879F97B5CBC}" type="slidenum">
+              <a:rPr b="0" lang="en-US"/>
+              <a:t>15</a:t>
+            </a:fld>
+            <a:endParaRPr lang="en-US"/>
+          </a:p>
+        </p:txBody>
+      </p:sp>
+    </p:spTree>
+  </p:cSld>
+  <p:clrMapOvr>
+    <a:masterClrMapping/>
+  </p:clrMapOvr>
+</p:sld>
+</file>
+
+<file path=ppt/slides/slide16.xml><?xml version="1.0" encoding="utf-8"?>
+<p:sld xmlns:a="http://schemas.openxmlformats.org/drawingml/2006/main" xmlns:r="http://schemas.openxmlformats.org/officeDocument/2006/relationships" xmlns:p="http://schemas.openxmlformats.org/presentationml/2006/main">
+  <p:cSld name="Slide 16">
+    <p:spTree>
+      <p:nvGrpSpPr>
+        <p:cNvPr id="1" name=""/>
+        <p:cNvGrpSpPr/>
+        <p:nvPr/>
+      </p:nvGrpSpPr>
+      <p:grpSpPr>
+        <a:xfrm>
+          <a:off x="0" y="0"/>
+          <a:ext cx="0" cy="0"/>
+          <a:chOff x="0" y="0"/>
+          <a:chExt cx="0" cy="0"/>
+        </a:xfrm>
+      </p:grpSpPr>
+      <p:sp>
+        <p:nvSpPr>
+          <p:cNvPr id="2" name="Text 0"/>
+          <p:cNvSpPr txBox="1"/>
+          <p:nvPr/>
+        </p:nvSpPr>
+        <p:spPr>
+          <a:xfrm>
             <a:off x="640080" y="457200"/>
             <a:ext cx="7863840" cy="731520"/>
           </a:xfrm>
@@ -2505,6 +4444,130 @@
               <a:t>Parada antecipada com validação</a:t>
             </a:r>
             <a:endParaRPr lang="en-US" sz="2200" dirty="0"/>
+          </a:p>
+        </p:txBody>
+      </p:sp>
+    </p:spTree>
+  </p:cSld>
+  <p:clrMapOvr>
+    <a:masterClrMapping/>
+  </p:clrMapOvr>
+</p:sld>
+</file>
+
+<file path=ppt/slides/slide17.xml><?xml version="1.0" encoding="utf-8"?>
+<p:sld xmlns:a="http://schemas.openxmlformats.org/drawingml/2006/main" xmlns:r="http://schemas.openxmlformats.org/officeDocument/2006/relationships" xmlns:p="http://schemas.openxmlformats.org/presentationml/2006/main">
+  <p:cSld name="Slide 17">
+    <p:spTree>
+      <p:nvGrpSpPr>
+        <p:cNvPr id="1" name=""/>
+        <p:cNvGrpSpPr/>
+        <p:nvPr/>
+      </p:nvGrpSpPr>
+      <p:grpSpPr>
+        <a:xfrm>
+          <a:off x="0" y="0"/>
+          <a:ext cx="0" cy="0"/>
+          <a:chOff x="0" y="0"/>
+          <a:chExt cx="0" cy="0"/>
+        </a:xfrm>
+      </p:grpSpPr>
+      <p:sp>
+        <p:nvSpPr>
+          <p:cNvPr id="2" name="Shape 0"/>
+          <p:cNvSpPr/>
+          <p:nvPr/>
+        </p:nvSpPr>
+        <p:spPr>
+          <a:xfrm>
+            <a:off x="640080" y="1188720"/>
+            <a:ext cx="109728" cy="2194560"/>
+          </a:xfrm>
+          <a:prstGeom prst="rect">
+            <a:avLst/>
+          </a:prstGeom>
+          <a:solidFill>
+            <a:srgbClr val="F59E0B"/>
+          </a:solidFill>
+          <a:ln w="12700">
+            <a:solidFill>
+              <a:srgbClr val="F59E0B"/>
+            </a:solidFill>
+            <a:prstDash val="solid"/>
+          </a:ln>
+        </p:spPr>
+      </p:sp>
+      <p:sp>
+        <p:nvSpPr>
+          <p:cNvPr id="3" name="Text 1"/>
+          <p:cNvSpPr txBox="1"/>
+          <p:nvPr/>
+        </p:nvSpPr>
+        <p:spPr>
+          <a:xfrm>
+            <a:off x="1005840" y="1097280"/>
+            <a:ext cx="7498080" cy="2377440"/>
+          </a:xfrm>
+          <a:prstGeom prst="rect">
+            <a:avLst/>
+          </a:prstGeom>
+          <a:noFill/>
+          <a:ln/>
+        </p:spPr>
+        <p:txBody>
+          <a:bodyPr wrap="square" lIns="0" tIns="0" rIns="0" bIns="0" rtlCol="0" anchor="ctr">
+            <a:normAutofit/>
+          </a:bodyPr>
+          <a:lstStyle/>
+          <a:p>
+            <a:pPr indent="0" marL="0">
+              <a:buNone/>
+            </a:pPr>
+            <a:r>
+              <a:rPr lang="en-US" sz="3400" b="1" dirty="0">
+                <a:solidFill>
+                  <a:srgbClr val="FFFFFF"/>
+                </a:solidFill>
+              </a:rPr>
+              <a:t>“RPROP: o gradiente diz para onde, não quanto.”</a:t>
+            </a:r>
+            <a:endParaRPr lang="en-US" sz="3400" dirty="0"/>
+          </a:p>
+        </p:txBody>
+      </p:sp>
+      <p:sp>
+        <p:nvSpPr>
+          <p:cNvPr id="4" name="Text 2"/>
+          <p:cNvSpPr txBox="1"/>
+          <p:nvPr/>
+        </p:nvSpPr>
+        <p:spPr>
+          <a:xfrm>
+            <a:off x="1005840" y="3931920"/>
+            <a:ext cx="7315200" cy="365760"/>
+          </a:xfrm>
+          <a:prstGeom prst="rect">
+            <a:avLst/>
+          </a:prstGeom>
+          <a:noFill/>
+          <a:ln/>
+        </p:spPr>
+        <p:txBody>
+          <a:bodyPr wrap="square" lIns="0" tIns="0" rIns="0" bIns="0" rtlCol="0" anchor="ctr"/>
+          <a:lstStyle/>
+          <a:p>
+            <a:pPr indent="0" marL="0">
+              <a:buNone/>
+            </a:pPr>
+            <a:r>
+              <a:rPr lang="en-US" sz="1400" dirty="0">
+                <a:solidFill>
+                  <a:srgbClr val="A5B4FC"/>
+                </a:solidFill>
+              </a:rPr>
+              <a:t>Backpropagation e Redes Neurais · Capítulo 6</a:t>
+            </a:r>
+            <a:endParaRPr lang="en-US" sz="1400" dirty="0"/>
           </a:p>
         </p:txBody>
       </p:sp>
@@ -2568,7 +4631,7 @@
                 <a:ea typeface="Calibri" pitchFamily="34" charset="-122"/>
                 <a:cs typeface="Calibri" pitchFamily="34" charset="-120"/>
               </a:rPr>
-              <a:t>Situação inicial: o gradiente mente sobre o tamanho</a:t>
+              <a:t>Roteiro da aula</a:t>
             </a:r>
             <a:endParaRPr lang="en-US" sz="2600" dirty="0"/>
           </a:p>
@@ -2582,8 +4645,8 @@
         </p:nvSpPr>
         <p:spPr>
           <a:xfrm>
-            <a:off x="548640" y="1188720"/>
-            <a:ext cx="8046720" cy="3383280"/>
+            <a:off x="731520" y="1188720"/>
+            <a:ext cx="7680960" cy="3291840"/>
           </a:xfrm>
           <a:prstGeom prst="rect">
             <a:avLst/>
@@ -2592,63 +4655,121 @@
           <a:ln/>
         </p:spPr>
         <p:txBody>
-          <a:bodyPr wrap="square" lIns="0" tIns="0" rIns="0" bIns="0" rtlCol="0" anchor="t">
-            <a:normAutofit/>
-          </a:bodyPr>
+          <a:bodyPr wrap="square" lIns="0" tIns="0" rIns="0" bIns="0" rtlCol="0" anchor="t"/>
           <a:lstStyle/>
           <a:p>
             <a:pPr marL="342900" indent="-342900">
               <a:spcAft>
-                <a:spcPts val="1400"/>
+                <a:spcPts val="1200"/>
               </a:spcAft>
               <a:buSzPct val="100000"/>
-              <a:buChar char="•"/>
-            </a:pPr>
-            <a:r>
-              <a:rPr lang="en-US" sz="2400" dirty="0">
+              <a:buFont typeface="+mj-lt"/>
+              <a:buAutoNum type="arabicPeriod" startAt="1"/>
+            </a:pPr>
+            <a:r>
+              <a:rPr lang="en-US" sz="2200" dirty="0">
                 <a:solidFill>
                   <a:srgbClr val="1F2937"/>
                 </a:solidFill>
               </a:rPr>
-              <a:t>Em regiões planas o gradiente é minúsculo; em íngremes, enorme</a:t>
-            </a:r>
-            <a:endParaRPr lang="en-US" sz="2400" dirty="0"/>
+              <a:t>Situação inicial e objetivos</a:t>
+            </a:r>
+            <a:endParaRPr lang="en-US" sz="2200" dirty="0"/>
           </a:p>
           <a:p>
             <a:pPr marL="342900" indent="-342900">
               <a:spcAft>
-                <a:spcPts val="1400"/>
+                <a:spcPts val="1200"/>
               </a:spcAft>
               <a:buSzPct val="100000"/>
-              <a:buChar char="•"/>
-            </a:pPr>
-            <a:r>
-              <a:rPr lang="en-US" sz="2400" dirty="0">
+              <a:buFont typeface="+mj-lt"/>
+              <a:buAutoNum type="arabicPeriod" startAt="1"/>
+            </a:pPr>
+            <a:r>
+              <a:rPr lang="en-US" sz="2200" dirty="0">
                 <a:solidFill>
                   <a:srgbClr val="1F2937"/>
                 </a:solidFill>
               </a:rPr>
-              <a:t>RPROP ignora o tamanho e usa só o sinal</a:t>
-            </a:r>
-            <a:endParaRPr lang="en-US" sz="2400" dirty="0"/>
+              <a:t>Analogia do dia a dia</a:t>
+            </a:r>
+            <a:endParaRPr lang="en-US" sz="2200" dirty="0"/>
           </a:p>
           <a:p>
             <a:pPr marL="342900" indent="-342900">
               <a:spcAft>
-                <a:spcPts val="1400"/>
+                <a:spcPts val="1200"/>
               </a:spcAft>
               <a:buSzPct val="100000"/>
-              <a:buChar char="•"/>
-            </a:pPr>
-            <a:r>
-              <a:rPr lang="en-US" sz="2400" dirty="0">
+              <a:buFont typeface="+mj-lt"/>
+              <a:buAutoNum type="arabicPeriod" startAt="1"/>
+            </a:pPr>
+            <a:r>
+              <a:rPr lang="en-US" sz="2200" dirty="0">
                 <a:solidFill>
                   <a:srgbClr val="1F2937"/>
                 </a:solidFill>
               </a:rPr>
-              <a:t>Cada peso tem o seu próprio passo Δᵢ</a:t>
-            </a:r>
-            <a:endParaRPr lang="en-US" sz="2400" dirty="0"/>
+              <a:t>Conceitos, demonstrações e figuras</a:t>
+            </a:r>
+            <a:endParaRPr lang="en-US" sz="2200" dirty="0"/>
+          </a:p>
+          <a:p>
+            <a:pPr marL="342900" indent="-342900">
+              <a:spcAft>
+                <a:spcPts val="1200"/>
+              </a:spcAft>
+              <a:buSzPct val="100000"/>
+              <a:buFont typeface="+mj-lt"/>
+              <a:buAutoNum type="arabicPeriod" startAt="1"/>
+            </a:pPr>
+            <a:r>
+              <a:rPr lang="en-US" sz="2200" dirty="0">
+                <a:solidFill>
+                  <a:srgbClr val="1F2937"/>
+                </a:solidFill>
+              </a:rPr>
+              <a:t>Exemplos e resultados do livro</a:t>
+            </a:r>
+            <a:endParaRPr lang="en-US" sz="2200" dirty="0"/>
+          </a:p>
+          <a:p>
+            <a:pPr marL="342900" indent="-342900">
+              <a:spcAft>
+                <a:spcPts val="1200"/>
+              </a:spcAft>
+              <a:buSzPct val="100000"/>
+              <a:buFont typeface="+mj-lt"/>
+              <a:buAutoNum type="arabicPeriod" startAt="1"/>
+            </a:pPr>
+            <a:r>
+              <a:rPr lang="en-US" sz="2200" dirty="0">
+                <a:solidFill>
+                  <a:srgbClr val="1F2937"/>
+                </a:solidFill>
+              </a:rPr>
+              <a:t>Quiz relâmpago</a:t>
+            </a:r>
+            <a:endParaRPr lang="en-US" sz="2200" dirty="0"/>
+          </a:p>
+          <a:p>
+            <a:pPr marL="342900" indent="-342900">
+              <a:spcAft>
+                <a:spcPts val="1200"/>
+              </a:spcAft>
+              <a:buSzPct val="100000"/>
+              <a:buFont typeface="+mj-lt"/>
+              <a:buAutoNum type="arabicPeriod" startAt="1"/>
+            </a:pPr>
+            <a:r>
+              <a:rPr lang="en-US" sz="2200" dirty="0">
+                <a:solidFill>
+                  <a:srgbClr val="1F2937"/>
+                </a:solidFill>
+              </a:rPr>
+              <a:t>Atividade mão na massa e síntese</a:t>
+            </a:r>
+            <a:endParaRPr lang="en-US" sz="2200" dirty="0"/>
           </a:p>
         </p:txBody>
       </p:sp>
@@ -2757,46 +4878,22 @@
                 <a:ea typeface="Calibri" pitchFamily="34" charset="-122"/>
                 <a:cs typeface="Calibri" pitchFamily="34" charset="-120"/>
               </a:rPr>
-              <a:t>Passo Manhattan</a:t>
+              <a:t>Situação inicial: o gradiente mente sobre o tamanho</a:t>
             </a:r>
             <a:endParaRPr lang="en-US" sz="2600" dirty="0"/>
           </a:p>
         </p:txBody>
       </p:sp>
-      <p:pic>
-        <p:nvPicPr>
-          <p:cNvPr id="3" name="Image 0" descr="Movimentos paralelos aos eixos, como quarteirões.">    </p:cNvPr>
-          <p:cNvPicPr>
-            <a:picLocks noChangeAspect="1"/>
-          </p:cNvPicPr>
-          <p:nvPr/>
-        </p:nvPicPr>
-        <p:blipFill>
-          <a:blip r:embed="rId1"/>
-          <a:stretch>
-            <a:fillRect/>
-          </a:stretch>
-        </p:blipFill>
-        <p:spPr>
-          <a:xfrm>
-            <a:off x="968663" y="1005840"/>
-            <a:ext cx="7206673" cy="3154680"/>
-          </a:xfrm>
-          <a:prstGeom prst="rect">
-            <a:avLst/>
-          </a:prstGeom>
-        </p:spPr>
-      </p:pic>
-      <p:sp>
-        <p:nvSpPr>
-          <p:cNvPr id="4" name="Text 1"/>
+      <p:sp>
+        <p:nvSpPr>
+          <p:cNvPr id="3" name="Text 1"/>
           <p:cNvSpPr txBox="1"/>
           <p:nvPr/>
         </p:nvSpPr>
         <p:spPr>
           <a:xfrm>
-            <a:off x="457200" y="4251960"/>
-            <a:ext cx="8229600" cy="457200"/>
+            <a:off x="548640" y="1188720"/>
+            <a:ext cx="8046720" cy="3383280"/>
           </a:xfrm>
           <a:prstGeom prst="rect">
             <a:avLst/>
@@ -2810,18 +4907,58 @@
           </a:bodyPr>
           <a:lstStyle/>
           <a:p>
-            <a:pPr algn="ctr" indent="0" marL="0">
-              <a:buNone/>
-            </a:pPr>
-            <a:r>
-              <a:rPr lang="en-US" sz="1400" i="1" dirty="0">
-                <a:solidFill>
-                  <a:srgbClr val="4B5563"/>
-                </a:solidFill>
-              </a:rPr>
-              <a:t>Movimentos paralelos aos eixos, como quarteirões.</a:t>
-            </a:r>
-            <a:endParaRPr lang="en-US" sz="1400" dirty="0"/>
+            <a:pPr marL="342900" indent="-342900">
+              <a:spcAft>
+                <a:spcPts val="1400"/>
+              </a:spcAft>
+              <a:buSzPct val="100000"/>
+              <a:buChar char="•"/>
+            </a:pPr>
+            <a:r>
+              <a:rPr lang="en-US" sz="2400" dirty="0">
+                <a:solidFill>
+                  <a:srgbClr val="1F2937"/>
+                </a:solidFill>
+              </a:rPr>
+              <a:t>Em regiões planas o gradiente é minúsculo; em íngremes, enorme</a:t>
+            </a:r>
+            <a:endParaRPr lang="en-US" sz="2400" dirty="0"/>
+          </a:p>
+          <a:p>
+            <a:pPr marL="342900" indent="-342900">
+              <a:spcAft>
+                <a:spcPts val="1400"/>
+              </a:spcAft>
+              <a:buSzPct val="100000"/>
+              <a:buChar char="•"/>
+            </a:pPr>
+            <a:r>
+              <a:rPr lang="en-US" sz="2400" dirty="0">
+                <a:solidFill>
+                  <a:srgbClr val="1F2937"/>
+                </a:solidFill>
+              </a:rPr>
+              <a:t>RPROP ignora o tamanho e usa só o sinal</a:t>
+            </a:r>
+            <a:endParaRPr lang="en-US" sz="2400" dirty="0"/>
+          </a:p>
+          <a:p>
+            <a:pPr marL="342900" indent="-342900">
+              <a:spcAft>
+                <a:spcPts val="1400"/>
+              </a:spcAft>
+              <a:buSzPct val="100000"/>
+              <a:buChar char="•"/>
+            </a:pPr>
+            <a:r>
+              <a:rPr lang="en-US" sz="2400" dirty="0">
+                <a:solidFill>
+                  <a:srgbClr val="1F2937"/>
+                </a:solidFill>
+              </a:rPr>
+              <a:t>Cada peso tem o seu próprio passo Δᵢ</a:t>
+            </a:r>
+            <a:endParaRPr lang="en-US" sz="2400" dirty="0"/>
           </a:p>
         </p:txBody>
       </p:sp>
@@ -2930,49 +5067,46 @@
                 <a:ea typeface="Calibri" pitchFamily="34" charset="-122"/>
                 <a:cs typeface="Calibri" pitchFamily="34" charset="-120"/>
               </a:rPr>
-              <a:t>A regra do RPROP</a:t>
+              <a:t>Passo Manhattan</a:t>
             </a:r>
             <a:endParaRPr lang="en-US" sz="2600" dirty="0"/>
           </a:p>
         </p:txBody>
       </p:sp>
-      <p:sp>
-        <p:nvSpPr>
-          <p:cNvPr id="3" name="Shape 1"/>
-          <p:cNvSpPr/>
-          <p:nvPr/>
-        </p:nvSpPr>
-        <p:spPr>
-          <a:xfrm>
-            <a:off x="457200" y="1097280"/>
-            <a:ext cx="8229600" cy="868680"/>
-          </a:xfrm>
-          <a:prstGeom prst="roundRect">
-            <a:avLst>
-              <a:gd name="adj" fmla="val 8421"/>
-            </a:avLst>
-          </a:prstGeom>
-          <a:solidFill>
-            <a:srgbClr val="E0E7FF"/>
-          </a:solidFill>
-          <a:ln w="9525">
-            <a:solidFill>
-              <a:srgbClr val="C7D2FE"/>
-            </a:solidFill>
-            <a:prstDash val="solid"/>
-          </a:ln>
-        </p:spPr>
-      </p:sp>
-      <p:sp>
-        <p:nvSpPr>
-          <p:cNvPr id="4" name="Text 2"/>
+      <p:pic>
+        <p:nvPicPr>
+          <p:cNvPr id="3" name="Image 0" descr="Movimentos paralelos aos eixos, como quarteirões.">    </p:cNvPr>
+          <p:cNvPicPr>
+            <a:picLocks noChangeAspect="1"/>
+          </p:cNvPicPr>
+          <p:nvPr/>
+        </p:nvPicPr>
+        <p:blipFill>
+          <a:blip r:embed="rId1"/>
+          <a:stretch>
+            <a:fillRect/>
+          </a:stretch>
+        </p:blipFill>
+        <p:spPr>
+          <a:xfrm>
+            <a:off x="968663" y="1005840"/>
+            <a:ext cx="7206673" cy="3154680"/>
+          </a:xfrm>
+          <a:prstGeom prst="rect">
+            <a:avLst/>
+          </a:prstGeom>
+        </p:spPr>
+      </p:pic>
+      <p:sp>
+        <p:nvSpPr>
+          <p:cNvPr id="4" name="Text 1"/>
           <p:cNvSpPr txBox="1"/>
           <p:nvPr/>
         </p:nvSpPr>
         <p:spPr>
           <a:xfrm>
-            <a:off x="594360" y="1097280"/>
-            <a:ext cx="2743200" cy="868680"/>
+            <a:off x="457200" y="4251960"/>
+            <a:ext cx="8229600" cy="457200"/>
           </a:xfrm>
           <a:prstGeom prst="rect">
             <a:avLst/>
@@ -2981,276 +5115,23 @@
           <a:ln/>
         </p:spPr>
         <p:txBody>
-          <a:bodyPr wrap="square" lIns="0" tIns="0" rIns="0" bIns="0" rtlCol="0" anchor="ctr">
+          <a:bodyPr wrap="square" lIns="0" tIns="0" rIns="0" bIns="0" rtlCol="0" anchor="t">
             <a:normAutofit/>
           </a:bodyPr>
           <a:lstStyle/>
           <a:p>
-            <a:pPr indent="0" marL="0">
+            <a:pPr algn="ctr" indent="0" marL="0">
               <a:buNone/>
             </a:pPr>
             <a:r>
-              <a:rPr lang="en-US" sz="1400" b="1" dirty="0">
-                <a:solidFill>
-                  <a:srgbClr val="312E81"/>
-                </a:solidFill>
-              </a:rPr>
-              <a:t>1. Mesmo sinal</a:t>
+              <a:rPr lang="en-US" sz="1400" i="1" dirty="0">
+                <a:solidFill>
+                  <a:srgbClr val="4B5563"/>
+                </a:solidFill>
+              </a:rPr>
+              <a:t>Movimentos paralelos aos eixos, como quarteirões.</a:t>
             </a:r>
             <a:endParaRPr lang="en-US" sz="1400" dirty="0"/>
-          </a:p>
-        </p:txBody>
-      </p:sp>
-      <p:sp>
-        <p:nvSpPr>
-          <p:cNvPr id="5" name="Text 3"/>
-          <p:cNvSpPr txBox="1"/>
-          <p:nvPr/>
-        </p:nvSpPr>
-        <p:spPr>
-          <a:xfrm>
-            <a:off x="3383280" y="1097280"/>
-            <a:ext cx="5212080" cy="868680"/>
-          </a:xfrm>
-          <a:prstGeom prst="rect">
-            <a:avLst/>
-          </a:prstGeom>
-          <a:noFill/>
-          <a:ln/>
-        </p:spPr>
-        <p:txBody>
-          <a:bodyPr wrap="square" lIns="0" tIns="0" rIns="0" bIns="0" rtlCol="0" anchor="ctr">
-            <a:normAutofit/>
-          </a:bodyPr>
-          <a:lstStyle/>
-          <a:p>
-            <a:pPr indent="0" marL="0">
-              <a:buNone/>
-            </a:pPr>
-            <a:r>
-              <a:rPr lang="en-US" sz="1700" dirty="0">
-                <a:solidFill>
-                  <a:srgbClr val="1F2937"/>
-                </a:solidFill>
-                <a:latin typeface="Cambria Math" pitchFamily="34" charset="0"/>
-                <a:ea typeface="Cambria Math" pitchFamily="34" charset="-122"/>
-                <a:cs typeface="Cambria Math" pitchFamily="34" charset="-120"/>
-              </a:rPr>
-              <a:t>Δᵢ ← min(η⁺ Δᵢ, Δmax)    (η⁺ = 1,2)</a:t>
-            </a:r>
-            <a:endParaRPr lang="en-US" sz="1700" dirty="0"/>
-          </a:p>
-        </p:txBody>
-      </p:sp>
-      <p:sp>
-        <p:nvSpPr>
-          <p:cNvPr id="6" name="Shape 4"/>
-          <p:cNvSpPr/>
-          <p:nvPr/>
-        </p:nvSpPr>
-        <p:spPr>
-          <a:xfrm>
-            <a:off x="457200" y="2039112"/>
-            <a:ext cx="8229600" cy="868680"/>
-          </a:xfrm>
-          <a:prstGeom prst="roundRect">
-            <a:avLst>
-              <a:gd name="adj" fmla="val 8421"/>
-            </a:avLst>
-          </a:prstGeom>
-          <a:solidFill>
-            <a:srgbClr val="EEF2FF"/>
-          </a:solidFill>
-          <a:ln w="9525">
-            <a:solidFill>
-              <a:srgbClr val="C7D2FE"/>
-            </a:solidFill>
-            <a:prstDash val="solid"/>
-          </a:ln>
-        </p:spPr>
-      </p:sp>
-      <p:sp>
-        <p:nvSpPr>
-          <p:cNvPr id="7" name="Text 5"/>
-          <p:cNvSpPr txBox="1"/>
-          <p:nvPr/>
-        </p:nvSpPr>
-        <p:spPr>
-          <a:xfrm>
-            <a:off x="594360" y="2039112"/>
-            <a:ext cx="2743200" cy="868680"/>
-          </a:xfrm>
-          <a:prstGeom prst="rect">
-            <a:avLst/>
-          </a:prstGeom>
-          <a:noFill/>
-          <a:ln/>
-        </p:spPr>
-        <p:txBody>
-          <a:bodyPr wrap="square" lIns="0" tIns="0" rIns="0" bIns="0" rtlCol="0" anchor="ctr">
-            <a:normAutofit/>
-          </a:bodyPr>
-          <a:lstStyle/>
-          <a:p>
-            <a:pPr indent="0" marL="0">
-              <a:buNone/>
-            </a:pPr>
-            <a:r>
-              <a:rPr lang="en-US" sz="1400" b="1" dirty="0">
-                <a:solidFill>
-                  <a:srgbClr val="312E81"/>
-                </a:solidFill>
-              </a:rPr>
-              <a:t>2. Sinal trocado</a:t>
-            </a:r>
-            <a:endParaRPr lang="en-US" sz="1400" dirty="0"/>
-          </a:p>
-        </p:txBody>
-      </p:sp>
-      <p:sp>
-        <p:nvSpPr>
-          <p:cNvPr id="8" name="Text 6"/>
-          <p:cNvSpPr txBox="1"/>
-          <p:nvPr/>
-        </p:nvSpPr>
-        <p:spPr>
-          <a:xfrm>
-            <a:off x="3383280" y="2039112"/>
-            <a:ext cx="5212080" cy="868680"/>
-          </a:xfrm>
-          <a:prstGeom prst="rect">
-            <a:avLst/>
-          </a:prstGeom>
-          <a:noFill/>
-          <a:ln/>
-        </p:spPr>
-        <p:txBody>
-          <a:bodyPr wrap="square" lIns="0" tIns="0" rIns="0" bIns="0" rtlCol="0" anchor="ctr">
-            <a:normAutofit/>
-          </a:bodyPr>
-          <a:lstStyle/>
-          <a:p>
-            <a:pPr indent="0" marL="0">
-              <a:buNone/>
-            </a:pPr>
-            <a:r>
-              <a:rPr lang="en-US" sz="1700" dirty="0">
-                <a:solidFill>
-                  <a:srgbClr val="1F2937"/>
-                </a:solidFill>
-                <a:latin typeface="Cambria Math" pitchFamily="34" charset="0"/>
-                <a:ea typeface="Cambria Math" pitchFamily="34" charset="-122"/>
-                <a:cs typeface="Cambria Math" pitchFamily="34" charset="-120"/>
-              </a:rPr>
-              <a:t>Δᵢ ← max(η⁻ Δᵢ, Δmin)    (η⁻ = 0,5)</a:t>
-            </a:r>
-            <a:endParaRPr lang="en-US" sz="1700" dirty="0"/>
-          </a:p>
-        </p:txBody>
-      </p:sp>
-      <p:sp>
-        <p:nvSpPr>
-          <p:cNvPr id="9" name="Shape 7"/>
-          <p:cNvSpPr/>
-          <p:nvPr/>
-        </p:nvSpPr>
-        <p:spPr>
-          <a:xfrm>
-            <a:off x="457200" y="2980944"/>
-            <a:ext cx="8229600" cy="868680"/>
-          </a:xfrm>
-          <a:prstGeom prst="roundRect">
-            <a:avLst>
-              <a:gd name="adj" fmla="val 8421"/>
-            </a:avLst>
-          </a:prstGeom>
-          <a:solidFill>
-            <a:srgbClr val="E0E7FF"/>
-          </a:solidFill>
-          <a:ln w="9525">
-            <a:solidFill>
-              <a:srgbClr val="C7D2FE"/>
-            </a:solidFill>
-            <a:prstDash val="solid"/>
-          </a:ln>
-        </p:spPr>
-      </p:sp>
-      <p:sp>
-        <p:nvSpPr>
-          <p:cNvPr id="10" name="Text 8"/>
-          <p:cNvSpPr txBox="1"/>
-          <p:nvPr/>
-        </p:nvSpPr>
-        <p:spPr>
-          <a:xfrm>
-            <a:off x="594360" y="2980944"/>
-            <a:ext cx="2743200" cy="868680"/>
-          </a:xfrm>
-          <a:prstGeom prst="rect">
-            <a:avLst/>
-          </a:prstGeom>
-          <a:noFill/>
-          <a:ln/>
-        </p:spPr>
-        <p:txBody>
-          <a:bodyPr wrap="square" lIns="0" tIns="0" rIns="0" bIns="0" rtlCol="0" anchor="ctr">
-            <a:normAutofit/>
-          </a:bodyPr>
-          <a:lstStyle/>
-          <a:p>
-            <a:pPr indent="0" marL="0">
-              <a:buNone/>
-            </a:pPr>
-            <a:r>
-              <a:rPr lang="en-US" sz="1400" b="1" dirty="0">
-                <a:solidFill>
-                  <a:srgbClr val="312E81"/>
-                </a:solidFill>
-              </a:rPr>
-              <a:t>3. Passo</a:t>
-            </a:r>
-            <a:endParaRPr lang="en-US" sz="1400" dirty="0"/>
-          </a:p>
-        </p:txBody>
-      </p:sp>
-      <p:sp>
-        <p:nvSpPr>
-          <p:cNvPr id="11" name="Text 9"/>
-          <p:cNvSpPr txBox="1"/>
-          <p:nvPr/>
-        </p:nvSpPr>
-        <p:spPr>
-          <a:xfrm>
-            <a:off x="3383280" y="2980944"/>
-            <a:ext cx="5212080" cy="868680"/>
-          </a:xfrm>
-          <a:prstGeom prst="rect">
-            <a:avLst/>
-          </a:prstGeom>
-          <a:noFill/>
-          <a:ln/>
-        </p:spPr>
-        <p:txBody>
-          <a:bodyPr wrap="square" lIns="0" tIns="0" rIns="0" bIns="0" rtlCol="0" anchor="ctr">
-            <a:normAutofit/>
-          </a:bodyPr>
-          <a:lstStyle/>
-          <a:p>
-            <a:pPr indent="0" marL="0">
-              <a:buNone/>
-            </a:pPr>
-            <a:r>
-              <a:rPr lang="en-US" sz="1700" dirty="0">
-                <a:solidFill>
-                  <a:srgbClr val="1F2937"/>
-                </a:solidFill>
-                <a:latin typeface="Cambria Math" pitchFamily="34" charset="0"/>
-                <a:ea typeface="Cambria Math" pitchFamily="34" charset="-122"/>
-                <a:cs typeface="Cambria Math" pitchFamily="34" charset="-120"/>
-              </a:rPr>
-              <a:t>wᵢ ← wᵢ − sinal(gᵢ) · Δᵢ</a:t>
-            </a:r>
-            <a:endParaRPr lang="en-US" sz="1700" dirty="0"/>
           </a:p>
         </p:txBody>
       </p:sp>
@@ -3359,46 +5240,85 @@
                 <a:ea typeface="Calibri" pitchFamily="34" charset="-122"/>
                 <a:cs typeface="Calibri" pitchFamily="34" charset="-120"/>
               </a:rPr>
-              <a:t>Quatro variantes</a:t>
+              <a:t>Analogia: o motorista que só olha o sentido</a:t>
             </a:r>
             <a:endParaRPr lang="en-US" sz="2600" dirty="0"/>
           </a:p>
         </p:txBody>
       </p:sp>
-      <p:pic>
-        <p:nvPicPr>
-          <p:cNvPr id="3" name="Image 0" descr="RPROP+, RPROP−, iRPROP+ e iRPROP−: o que cada uma faz na troca de sinal.">    </p:cNvPr>
-          <p:cNvPicPr>
-            <a:picLocks noChangeAspect="1"/>
-          </p:cNvPicPr>
-          <p:nvPr/>
-        </p:nvPicPr>
-        <p:blipFill>
-          <a:blip r:embed="rId1"/>
-          <a:stretch>
-            <a:fillRect/>
-          </a:stretch>
-        </p:blipFill>
-        <p:spPr>
-          <a:xfrm>
-            <a:off x="774235" y="1005840"/>
-            <a:ext cx="7595531" cy="3154680"/>
-          </a:xfrm>
-          <a:prstGeom prst="rect">
-            <a:avLst/>
-          </a:prstGeom>
-        </p:spPr>
-      </p:pic>
-      <p:sp>
-        <p:nvSpPr>
-          <p:cNvPr id="4" name="Text 1"/>
+      <p:sp>
+        <p:nvSpPr>
+          <p:cNvPr id="3" name="Shape 1"/>
+          <p:cNvSpPr/>
+          <p:nvPr/>
+        </p:nvSpPr>
+        <p:spPr>
+          <a:xfrm>
+            <a:off x="548640" y="1188720"/>
+            <a:ext cx="8046720" cy="3108960"/>
+          </a:xfrm>
+          <a:prstGeom prst="roundRect">
+            <a:avLst>
+              <a:gd name="adj" fmla="val 3529"/>
+            </a:avLst>
+          </a:prstGeom>
+          <a:solidFill>
+            <a:srgbClr val="ECFEFF"/>
+          </a:solidFill>
+          <a:ln w="25400">
+            <a:solidFill>
+              <a:srgbClr val="06B6D4"/>
+            </a:solidFill>
+            <a:prstDash val="solid"/>
+          </a:ln>
+        </p:spPr>
+      </p:sp>
+      <p:sp>
+        <p:nvSpPr>
+          <p:cNvPr id="4" name="Text 2"/>
           <p:cNvSpPr txBox="1"/>
           <p:nvPr/>
         </p:nvSpPr>
         <p:spPr>
           <a:xfrm>
-            <a:off x="457200" y="4251960"/>
-            <a:ext cx="8229600" cy="457200"/>
+            <a:off x="822960" y="1325880"/>
+            <a:ext cx="3657600" cy="365760"/>
+          </a:xfrm>
+          <a:prstGeom prst="rect">
+            <a:avLst/>
+          </a:prstGeom>
+          <a:noFill/>
+          <a:ln/>
+        </p:spPr>
+        <p:txBody>
+          <a:bodyPr wrap="square" lIns="0" tIns="0" rIns="0" bIns="0" rtlCol="0" anchor="ctr"/>
+          <a:lstStyle/>
+          <a:p>
+            <a:pPr indent="0" marL="0">
+              <a:buNone/>
+            </a:pPr>
+            <a:r>
+              <a:rPr lang="en-US" sz="1400" b="1" spc="300" kern="0" dirty="0">
+                <a:solidFill>
+                  <a:srgbClr val="0E7490"/>
+                </a:solidFill>
+              </a:rPr>
+              <a:t>NO SEU DIA A DIA</a:t>
+            </a:r>
+            <a:endParaRPr lang="en-US" sz="1400" dirty="0"/>
+          </a:p>
+        </p:txBody>
+      </p:sp>
+      <p:sp>
+        <p:nvSpPr>
+          <p:cNvPr id="5" name="Text 3"/>
+          <p:cNvSpPr txBox="1"/>
+          <p:nvPr/>
+        </p:nvSpPr>
+        <p:spPr>
+          <a:xfrm>
+            <a:off x="822960" y="1783080"/>
+            <a:ext cx="7498080" cy="2377440"/>
           </a:xfrm>
           <a:prstGeom prst="rect">
             <a:avLst/>
@@ -3412,18 +5332,18 @@
           </a:bodyPr>
           <a:lstStyle/>
           <a:p>
-            <a:pPr algn="ctr" indent="0" marL="0">
+            <a:pPr indent="0" marL="0">
               <a:buNone/>
             </a:pPr>
             <a:r>
-              <a:rPr lang="en-US" sz="1400" i="1" dirty="0">
-                <a:solidFill>
-                  <a:srgbClr val="4B5563"/>
-                </a:solidFill>
-              </a:rPr>
-              <a:t>RPROP+, RPROP−, iRPROP+ e iRPROP−: o que cada uma faz na troca de sinal.</a:t>
-            </a:r>
-            <a:endParaRPr lang="en-US" sz="1400" dirty="0"/>
+              <a:rPr lang="en-US" sz="2100" dirty="0">
+                <a:solidFill>
+                  <a:srgbClr val="1F2937"/>
+                </a:solidFill>
+              </a:rPr>
+              <a:t>Imagine dirigir sem velocímetro, só perguntando: estou indo no mesmo sentido de antes? Se sim, acelere um pouco (×1,2). Se o sentido mudou, você passou do ponto: freie (×0,5). É o RPROP: usa só o sinal do gradiente, nunca o seu tamanho.</a:t>
+            </a:r>
+            <a:endParaRPr lang="en-US" sz="2100" dirty="0"/>
           </a:p>
         </p:txBody>
       </p:sp>
@@ -3532,46 +5452,49 @@
                 <a:ea typeface="Calibri" pitchFamily="34" charset="-122"/>
                 <a:cs typeface="Calibri" pitchFamily="34" charset="-120"/>
               </a:rPr>
-              <a:t>Regras em ação</a:t>
+              <a:t>A regra do RPROP</a:t>
             </a:r>
             <a:endParaRPr lang="en-US" sz="2600" dirty="0"/>
           </a:p>
         </p:txBody>
       </p:sp>
-      <p:pic>
-        <p:nvPicPr>
-          <p:cNvPr id="3" name="Image 0" descr="Evolução dos passos Δᵢ ao longo das épocas.">    </p:cNvPr>
-          <p:cNvPicPr>
-            <a:picLocks noChangeAspect="1"/>
-          </p:cNvPicPr>
-          <p:nvPr/>
-        </p:nvPicPr>
-        <p:blipFill>
-          <a:blip r:embed="rId1"/>
-          <a:stretch>
-            <a:fillRect/>
-          </a:stretch>
-        </p:blipFill>
-        <p:spPr>
-          <a:xfrm>
-            <a:off x="559670" y="1005840"/>
-            <a:ext cx="8024660" cy="3154680"/>
-          </a:xfrm>
-          <a:prstGeom prst="rect">
-            <a:avLst/>
-          </a:prstGeom>
-        </p:spPr>
-      </p:pic>
-      <p:sp>
-        <p:nvSpPr>
-          <p:cNvPr id="4" name="Text 1"/>
+      <p:sp>
+        <p:nvSpPr>
+          <p:cNvPr id="3" name="Shape 1"/>
+          <p:cNvSpPr/>
+          <p:nvPr/>
+        </p:nvSpPr>
+        <p:spPr>
+          <a:xfrm>
+            <a:off x="457200" y="1097280"/>
+            <a:ext cx="8229600" cy="868680"/>
+          </a:xfrm>
+          <a:prstGeom prst="roundRect">
+            <a:avLst>
+              <a:gd name="adj" fmla="val 8421"/>
+            </a:avLst>
+          </a:prstGeom>
+          <a:solidFill>
+            <a:srgbClr val="E0E7FF"/>
+          </a:solidFill>
+          <a:ln w="9525">
+            <a:solidFill>
+              <a:srgbClr val="C7D2FE"/>
+            </a:solidFill>
+            <a:prstDash val="solid"/>
+          </a:ln>
+        </p:spPr>
+      </p:sp>
+      <p:sp>
+        <p:nvSpPr>
+          <p:cNvPr id="4" name="Text 2"/>
           <p:cNvSpPr txBox="1"/>
           <p:nvPr/>
         </p:nvSpPr>
         <p:spPr>
           <a:xfrm>
-            <a:off x="457200" y="4251960"/>
-            <a:ext cx="8229600" cy="457200"/>
+            <a:off x="594360" y="1097280"/>
+            <a:ext cx="2743200" cy="868680"/>
           </a:xfrm>
           <a:prstGeom prst="rect">
             <a:avLst/>
@@ -3580,23 +5503,276 @@
           <a:ln/>
         </p:spPr>
         <p:txBody>
-          <a:bodyPr wrap="square" lIns="0" tIns="0" rIns="0" bIns="0" rtlCol="0" anchor="t">
+          <a:bodyPr wrap="square" lIns="0" tIns="0" rIns="0" bIns="0" rtlCol="0" anchor="ctr">
             <a:normAutofit/>
           </a:bodyPr>
           <a:lstStyle/>
           <a:p>
-            <a:pPr algn="ctr" indent="0" marL="0">
+            <a:pPr indent="0" marL="0">
               <a:buNone/>
             </a:pPr>
             <a:r>
-              <a:rPr lang="en-US" sz="1400" i="1" dirty="0">
-                <a:solidFill>
-                  <a:srgbClr val="4B5563"/>
-                </a:solidFill>
-              </a:rPr>
-              <a:t>Evolução dos passos Δᵢ ao longo das épocas.</a:t>
+              <a:rPr lang="en-US" sz="1400" b="1" dirty="0">
+                <a:solidFill>
+                  <a:srgbClr val="312E81"/>
+                </a:solidFill>
+              </a:rPr>
+              <a:t>1. Mesmo sinal</a:t>
             </a:r>
             <a:endParaRPr lang="en-US" sz="1400" dirty="0"/>
+          </a:p>
+        </p:txBody>
+      </p:sp>
+      <p:sp>
+        <p:nvSpPr>
+          <p:cNvPr id="5" name="Text 3"/>
+          <p:cNvSpPr txBox="1"/>
+          <p:nvPr/>
+        </p:nvSpPr>
+        <p:spPr>
+          <a:xfrm>
+            <a:off x="3383280" y="1097280"/>
+            <a:ext cx="5212080" cy="868680"/>
+          </a:xfrm>
+          <a:prstGeom prst="rect">
+            <a:avLst/>
+          </a:prstGeom>
+          <a:noFill/>
+          <a:ln/>
+        </p:spPr>
+        <p:txBody>
+          <a:bodyPr wrap="square" lIns="0" tIns="0" rIns="0" bIns="0" rtlCol="0" anchor="ctr">
+            <a:normAutofit/>
+          </a:bodyPr>
+          <a:lstStyle/>
+          <a:p>
+            <a:pPr indent="0" marL="0">
+              <a:buNone/>
+            </a:pPr>
+            <a:r>
+              <a:rPr lang="en-US" sz="1700" dirty="0">
+                <a:solidFill>
+                  <a:srgbClr val="1F2937"/>
+                </a:solidFill>
+                <a:latin typeface="Cambria Math" pitchFamily="34" charset="0"/>
+                <a:ea typeface="Cambria Math" pitchFamily="34" charset="-122"/>
+                <a:cs typeface="Cambria Math" pitchFamily="34" charset="-120"/>
+              </a:rPr>
+              <a:t>Δᵢ ← min(η⁺ Δᵢ, Δmax)    (η⁺ = 1,2)</a:t>
+            </a:r>
+            <a:endParaRPr lang="en-US" sz="1700" dirty="0"/>
+          </a:p>
+        </p:txBody>
+      </p:sp>
+      <p:sp>
+        <p:nvSpPr>
+          <p:cNvPr id="6" name="Shape 4"/>
+          <p:cNvSpPr/>
+          <p:nvPr/>
+        </p:nvSpPr>
+        <p:spPr>
+          <a:xfrm>
+            <a:off x="457200" y="2039112"/>
+            <a:ext cx="8229600" cy="868680"/>
+          </a:xfrm>
+          <a:prstGeom prst="roundRect">
+            <a:avLst>
+              <a:gd name="adj" fmla="val 8421"/>
+            </a:avLst>
+          </a:prstGeom>
+          <a:solidFill>
+            <a:srgbClr val="EEF2FF"/>
+          </a:solidFill>
+          <a:ln w="9525">
+            <a:solidFill>
+              <a:srgbClr val="C7D2FE"/>
+            </a:solidFill>
+            <a:prstDash val="solid"/>
+          </a:ln>
+        </p:spPr>
+      </p:sp>
+      <p:sp>
+        <p:nvSpPr>
+          <p:cNvPr id="7" name="Text 5"/>
+          <p:cNvSpPr txBox="1"/>
+          <p:nvPr/>
+        </p:nvSpPr>
+        <p:spPr>
+          <a:xfrm>
+            <a:off x="594360" y="2039112"/>
+            <a:ext cx="2743200" cy="868680"/>
+          </a:xfrm>
+          <a:prstGeom prst="rect">
+            <a:avLst/>
+          </a:prstGeom>
+          <a:noFill/>
+          <a:ln/>
+        </p:spPr>
+        <p:txBody>
+          <a:bodyPr wrap="square" lIns="0" tIns="0" rIns="0" bIns="0" rtlCol="0" anchor="ctr">
+            <a:normAutofit/>
+          </a:bodyPr>
+          <a:lstStyle/>
+          <a:p>
+            <a:pPr indent="0" marL="0">
+              <a:buNone/>
+            </a:pPr>
+            <a:r>
+              <a:rPr lang="en-US" sz="1400" b="1" dirty="0">
+                <a:solidFill>
+                  <a:srgbClr val="312E81"/>
+                </a:solidFill>
+              </a:rPr>
+              <a:t>2. Sinal trocado</a:t>
+            </a:r>
+            <a:endParaRPr lang="en-US" sz="1400" dirty="0"/>
+          </a:p>
+        </p:txBody>
+      </p:sp>
+      <p:sp>
+        <p:nvSpPr>
+          <p:cNvPr id="8" name="Text 6"/>
+          <p:cNvSpPr txBox="1"/>
+          <p:nvPr/>
+        </p:nvSpPr>
+        <p:spPr>
+          <a:xfrm>
+            <a:off x="3383280" y="2039112"/>
+            <a:ext cx="5212080" cy="868680"/>
+          </a:xfrm>
+          <a:prstGeom prst="rect">
+            <a:avLst/>
+          </a:prstGeom>
+          <a:noFill/>
+          <a:ln/>
+        </p:spPr>
+        <p:txBody>
+          <a:bodyPr wrap="square" lIns="0" tIns="0" rIns="0" bIns="0" rtlCol="0" anchor="ctr">
+            <a:normAutofit/>
+          </a:bodyPr>
+          <a:lstStyle/>
+          <a:p>
+            <a:pPr indent="0" marL="0">
+              <a:buNone/>
+            </a:pPr>
+            <a:r>
+              <a:rPr lang="en-US" sz="1700" dirty="0">
+                <a:solidFill>
+                  <a:srgbClr val="1F2937"/>
+                </a:solidFill>
+                <a:latin typeface="Cambria Math" pitchFamily="34" charset="0"/>
+                <a:ea typeface="Cambria Math" pitchFamily="34" charset="-122"/>
+                <a:cs typeface="Cambria Math" pitchFamily="34" charset="-120"/>
+              </a:rPr>
+              <a:t>Δᵢ ← max(η⁻ Δᵢ, Δmin)    (η⁻ = 0,5)</a:t>
+            </a:r>
+            <a:endParaRPr lang="en-US" sz="1700" dirty="0"/>
+          </a:p>
+        </p:txBody>
+      </p:sp>
+      <p:sp>
+        <p:nvSpPr>
+          <p:cNvPr id="9" name="Shape 7"/>
+          <p:cNvSpPr/>
+          <p:nvPr/>
+        </p:nvSpPr>
+        <p:spPr>
+          <a:xfrm>
+            <a:off x="457200" y="2980944"/>
+            <a:ext cx="8229600" cy="868680"/>
+          </a:xfrm>
+          <a:prstGeom prst="roundRect">
+            <a:avLst>
+              <a:gd name="adj" fmla="val 8421"/>
+            </a:avLst>
+          </a:prstGeom>
+          <a:solidFill>
+            <a:srgbClr val="E0E7FF"/>
+          </a:solidFill>
+          <a:ln w="9525">
+            <a:solidFill>
+              <a:srgbClr val="C7D2FE"/>
+            </a:solidFill>
+            <a:prstDash val="solid"/>
+          </a:ln>
+        </p:spPr>
+      </p:sp>
+      <p:sp>
+        <p:nvSpPr>
+          <p:cNvPr id="10" name="Text 8"/>
+          <p:cNvSpPr txBox="1"/>
+          <p:nvPr/>
+        </p:nvSpPr>
+        <p:spPr>
+          <a:xfrm>
+            <a:off x="594360" y="2980944"/>
+            <a:ext cx="2743200" cy="868680"/>
+          </a:xfrm>
+          <a:prstGeom prst="rect">
+            <a:avLst/>
+          </a:prstGeom>
+          <a:noFill/>
+          <a:ln/>
+        </p:spPr>
+        <p:txBody>
+          <a:bodyPr wrap="square" lIns="0" tIns="0" rIns="0" bIns="0" rtlCol="0" anchor="ctr">
+            <a:normAutofit/>
+          </a:bodyPr>
+          <a:lstStyle/>
+          <a:p>
+            <a:pPr indent="0" marL="0">
+              <a:buNone/>
+            </a:pPr>
+            <a:r>
+              <a:rPr lang="en-US" sz="1400" b="1" dirty="0">
+                <a:solidFill>
+                  <a:srgbClr val="312E81"/>
+                </a:solidFill>
+              </a:rPr>
+              <a:t>3. Passo</a:t>
+            </a:r>
+            <a:endParaRPr lang="en-US" sz="1400" dirty="0"/>
+          </a:p>
+        </p:txBody>
+      </p:sp>
+      <p:sp>
+        <p:nvSpPr>
+          <p:cNvPr id="11" name="Text 9"/>
+          <p:cNvSpPr txBox="1"/>
+          <p:nvPr/>
+        </p:nvSpPr>
+        <p:spPr>
+          <a:xfrm>
+            <a:off x="3383280" y="2980944"/>
+            <a:ext cx="5212080" cy="868680"/>
+          </a:xfrm>
+          <a:prstGeom prst="rect">
+            <a:avLst/>
+          </a:prstGeom>
+          <a:noFill/>
+          <a:ln/>
+        </p:spPr>
+        <p:txBody>
+          <a:bodyPr wrap="square" lIns="0" tIns="0" rIns="0" bIns="0" rtlCol="0" anchor="ctr">
+            <a:normAutofit/>
+          </a:bodyPr>
+          <a:lstStyle/>
+          <a:p>
+            <a:pPr indent="0" marL="0">
+              <a:buNone/>
+            </a:pPr>
+            <a:r>
+              <a:rPr lang="en-US" sz="1700" dirty="0">
+                <a:solidFill>
+                  <a:srgbClr val="1F2937"/>
+                </a:solidFill>
+                <a:latin typeface="Cambria Math" pitchFamily="34" charset="0"/>
+                <a:ea typeface="Cambria Math" pitchFamily="34" charset="-122"/>
+                <a:cs typeface="Cambria Math" pitchFamily="34" charset="-120"/>
+              </a:rPr>
+              <a:t>wᵢ ← wᵢ − sinal(gᵢ) · Δᵢ</a:t>
+            </a:r>
+            <a:endParaRPr lang="en-US" sz="1700" dirty="0"/>
           </a:p>
         </p:txBody>
       </p:sp>
@@ -3705,22 +5881,46 @@
                 <a:ea typeface="Calibri" pitchFamily="34" charset="-122"/>
                 <a:cs typeface="Calibri" pitchFamily="34" charset="-120"/>
               </a:rPr>
-              <a:t>O que o livro mediu</a:t>
+              <a:t>Quatro variantes</a:t>
             </a:r>
             <a:endParaRPr lang="en-US" sz="2600" dirty="0"/>
           </a:p>
         </p:txBody>
       </p:sp>
-      <p:sp>
-        <p:nvSpPr>
-          <p:cNvPr id="3" name="Text 1"/>
+      <p:pic>
+        <p:nvPicPr>
+          <p:cNvPr id="3" name="Image 0" descr="RPROP+, RPROP−, iRPROP+ e iRPROP−: o que cada uma faz na troca de sinal.">    </p:cNvPr>
+          <p:cNvPicPr>
+            <a:picLocks noChangeAspect="1"/>
+          </p:cNvPicPr>
+          <p:nvPr/>
+        </p:nvPicPr>
+        <p:blipFill>
+          <a:blip r:embed="rId1"/>
+          <a:stretch>
+            <a:fillRect/>
+          </a:stretch>
+        </p:blipFill>
+        <p:spPr>
+          <a:xfrm>
+            <a:off x="774235" y="1005840"/>
+            <a:ext cx="7595531" cy="3154680"/>
+          </a:xfrm>
+          <a:prstGeom prst="rect">
+            <a:avLst/>
+          </a:prstGeom>
+        </p:spPr>
+      </p:pic>
+      <p:sp>
+        <p:nvSpPr>
+          <p:cNvPr id="4" name="Text 1"/>
           <p:cNvSpPr txBox="1"/>
           <p:nvPr/>
         </p:nvSpPr>
         <p:spPr>
           <a:xfrm>
-            <a:off x="548640" y="1188720"/>
-            <a:ext cx="8046720" cy="3383280"/>
+            <a:off x="457200" y="4251960"/>
+            <a:ext cx="8229600" cy="457200"/>
           </a:xfrm>
           <a:prstGeom prst="rect">
             <a:avLst/>
@@ -3734,58 +5934,18 @@
           </a:bodyPr>
           <a:lstStyle/>
           <a:p>
-            <a:pPr marL="342900" indent="-342900">
-              <a:spcAft>
-                <a:spcPts val="1400"/>
-              </a:spcAft>
-              <a:buSzPct val="100000"/>
-              <a:buChar char="•"/>
-            </a:pPr>
-            <a:r>
-              <a:rPr lang="en-US" sz="2400" dirty="0">
-                <a:solidFill>
-                  <a:srgbClr val="1F2937"/>
-                </a:solidFill>
-              </a:rPr>
-              <a:t>iRPROP− e iRPROP+ cruzam 0,03 em ≈132–137 épocas; as outras, em ≈223–237</a:t>
-            </a:r>
-            <a:endParaRPr lang="en-US" sz="2400" dirty="0"/>
-          </a:p>
-          <a:p>
-            <a:pPr marL="342900" indent="-342900">
-              <a:spcAft>
-                <a:spcPts val="1400"/>
-              </a:spcAft>
-              <a:buSzPct val="100000"/>
-              <a:buChar char="•"/>
-            </a:pPr>
-            <a:r>
-              <a:rPr lang="en-US" sz="2400" dirty="0">
-                <a:solidFill>
-                  <a:srgbClr val="1F2937"/>
-                </a:solidFill>
-              </a:rPr>
-              <a:t>iRPROP+: 161 de 1776 retrocessos foram efetivos</a:t>
-            </a:r>
-            <a:endParaRPr lang="en-US" sz="2400" dirty="0"/>
-          </a:p>
-          <a:p>
-            <a:pPr marL="342900" indent="-342900">
-              <a:spcAft>
-                <a:spcPts val="1400"/>
-              </a:spcAft>
-              <a:buSzPct val="100000"/>
-              <a:buChar char="•"/>
-            </a:pPr>
-            <a:r>
-              <a:rPr lang="en-US" sz="2400" dirty="0">
-                <a:solidFill>
-                  <a:srgbClr val="1F2937"/>
-                </a:solidFill>
-              </a:rPr>
-              <a:t>Breast Cancer: acurácias de teste 0,947 a 0,953 nas quatro variantes e no lbfgs</a:t>
-            </a:r>
-            <a:endParaRPr lang="en-US" sz="2400" dirty="0"/>
+            <a:pPr algn="ctr" indent="0" marL="0">
+              <a:buNone/>
+            </a:pPr>
+            <a:r>
+              <a:rPr lang="en-US" sz="1400" i="1" dirty="0">
+                <a:solidFill>
+                  <a:srgbClr val="4B5563"/>
+                </a:solidFill>
+              </a:rPr>
+              <a:t>RPROP+, RPROP−, iRPROP+ e iRPROP−: o que cada uma faz na troca de sinal.</a:t>
+            </a:r>
+            <a:endParaRPr lang="en-US" sz="1400" dirty="0"/>
           </a:p>
         </p:txBody>
       </p:sp>
@@ -3894,7 +6054,7 @@
                 <a:ea typeface="Calibri" pitchFamily="34" charset="-122"/>
                 <a:cs typeface="Calibri" pitchFamily="34" charset="-120"/>
               </a:rPr>
-              <a:t>Parada antecipada</a:t>
+              <a:t>Regras de cada variante</a:t>
             </a:r>
             <a:endParaRPr lang="en-US" sz="2600" dirty="0"/>
           </a:p>
@@ -3902,7 +6062,7 @@
       </p:sp>
       <p:pic>
         <p:nvPicPr>
-          <p:cNvPr id="3" name="Image 0" descr="Paramos quando a validação deixa de melhorar.">    </p:cNvPr>
+          <p:cNvPr id="3" name="Image 0" descr="O que cada variante faz quando o sinal do gradiente muda.">    </p:cNvPr>
           <p:cNvPicPr>
             <a:picLocks noChangeAspect="1"/>
           </p:cNvPicPr>
@@ -3916,8 +6076,8 @@
         </p:blipFill>
         <p:spPr>
           <a:xfrm>
-            <a:off x="870593" y="1005840"/>
-            <a:ext cx="7402815" cy="3154680"/>
+            <a:off x="559670" y="1005840"/>
+            <a:ext cx="8024660" cy="3154680"/>
           </a:xfrm>
           <a:prstGeom prst="rect">
             <a:avLst/>
@@ -3956,7 +6116,7 @@
                   <a:srgbClr val="4B5563"/>
                 </a:solidFill>
               </a:rPr>
-              <a:t>Paramos quando a validação deixa de melhorar.</a:t>
+              <a:t>O que cada variante faz quando o sinal do gradiente muda.</a:t>
             </a:r>
             <a:endParaRPr lang="en-US" sz="1400" dirty="0"/>
           </a:p>
@@ -4067,7 +6227,7 @@
                 <a:ea typeface="Calibri" pitchFamily="34" charset="-122"/>
                 <a:cs typeface="Calibri" pitchFamily="34" charset="-120"/>
               </a:rPr>
-              <a:t>Erros frequentes</a:t>
+              <a:t>O que o livro mediu</a:t>
             </a:r>
             <a:endParaRPr lang="en-US" sz="2600" dirty="0"/>
           </a:p>
@@ -4109,7 +6269,7 @@
                   <a:srgbClr val="1F2937"/>
                 </a:solidFill>
               </a:rPr>
-              <a:t>Confundir as variantes (cada uma é uma regra separada)</a:t>
+              <a:t>iRPROP− e iRPROP+ cruzam 0,03 em ≈132–137 épocas; as outras, em ≈223–237</a:t>
             </a:r>
             <a:endParaRPr lang="en-US" sz="2400" dirty="0"/>
           </a:p>
@@ -4127,7 +6287,7 @@
                   <a:srgbClr val="1F2937"/>
                 </a:solidFill>
               </a:rPr>
-              <a:t>Usar RPROP em minilotes ruidosos</a:t>
+              <a:t>iRPROP+: 161 de 1776 retrocessos foram efetivos</a:t>
             </a:r>
             <a:endParaRPr lang="en-US" sz="2400" dirty="0"/>
           </a:p>
@@ -4145,25 +6305,7 @@
                   <a:srgbClr val="1F2937"/>
                 </a:solidFill>
               </a:rPr>
-              <a:t>Esquecer os limites Δmin e Δmax</a:t>
-            </a:r>
-            <a:endParaRPr lang="en-US" sz="2400" dirty="0"/>
-          </a:p>
-          <a:p>
-            <a:pPr marL="342900" indent="-342900">
-              <a:spcAft>
-                <a:spcPts val="1400"/>
-              </a:spcAft>
-              <a:buSzPct val="100000"/>
-              <a:buChar char="•"/>
-            </a:pPr>
-            <a:r>
-              <a:rPr lang="en-US" sz="2400" dirty="0">
-                <a:solidFill>
-                  <a:srgbClr val="1F2937"/>
-                </a:solidFill>
-              </a:rPr>
-              <a:t>Reportar a melhor semente</a:t>
+              <a:t>Breast Cancer: acurácias de teste 0,947 a 0,953 nas quatro variantes e no lbfgs</a:t>
             </a:r>
             <a:endParaRPr lang="en-US" sz="2400" dirty="0"/>
           </a:p>
